--- a/docs/Sonnabon.pptx
+++ b/docs/Sonnabon.pptx
@@ -15,9 +15,10 @@
     <p:sldId id="263" r:id="rId9"/>
     <p:sldId id="264" r:id="rId10"/>
     <p:sldId id="265" r:id="rId11"/>
+    <p:sldId id="266" r:id="rId12"/>
   </p:sldIdLst>
   <p:notesMasterIdLst>
-    <p:notesMasterId r:id="rId12"/>
+    <p:notesMasterId r:id="rId13"/>
   </p:notesMasterIdLst>
   <p:sldSz cx="12192000" cy="6858000"/>
   <p:notesSz cx="6858000" cy="12192000"/>
@@ -1295,6 +1296,94 @@
             <a:fld id="{F7021451-1387-4CA6-816F-3879F97B5CBC}" type="slidenum">
               <a:rPr lang="en-US"/>
               <a:t>10</a:t>
+            </a:fld>
+            <a:endParaRPr lang="en-US"/>
+          </a:p>
+        </p:txBody>
+      </p:sp>
+    </p:spTree>
+    <p:extLst>
+      <p:ext uri="{BB962C8B-B14F-4D97-AF65-F5344CB8AC3E}">
+        <p14:creationId xmlns:p14="http://schemas.microsoft.com/office/powerpoint/2010/main" val="1024086991"/>
+      </p:ext>
+    </p:extLst>
+  </p:cSld>
+  <p:clrMapOvr>
+    <a:masterClrMapping/>
+  </p:clrMapOvr>
+</p:notes>
+</file>
+
+<file path=ppt/notesSlides/notesSlide11.xml><?xml version="1.0" encoding="utf-8"?>
+<p:notes xmlns:a="http://schemas.openxmlformats.org/drawingml/2006/main" xmlns:r="http://schemas.openxmlformats.org/officeDocument/2006/relationships" xmlns:p="http://schemas.openxmlformats.org/presentationml/2006/main">
+  <p:cSld>
+    <p:spTree>
+      <p:nvGrpSpPr>
+        <p:cNvPr id="1" name=""/>
+        <p:cNvGrpSpPr/>
+        <p:nvPr/>
+      </p:nvGrpSpPr>
+      <p:grpSpPr>
+        <a:xfrm>
+          <a:off x="0" y="0"/>
+          <a:ext cx="0" cy="0"/>
+          <a:chOff x="0" y="0"/>
+          <a:chExt cx="0" cy="0"/>
+        </a:xfrm>
+      </p:grpSpPr>
+      <p:sp>
+        <p:nvSpPr>
+          <p:cNvPr id="2" name="Slide Image Placeholder 1"/>
+          <p:cNvSpPr>
+            <a:spLocks noGrp="1" noRot="1" noChangeAspect="1"/>
+          </p:cNvSpPr>
+          <p:nvPr>
+            <p:ph type="sldImg"/>
+          </p:nvPr>
+        </p:nvSpPr>
+        <p:spPr/>
+      </p:sp>
+      <p:sp>
+        <p:nvSpPr>
+          <p:cNvPr id="3" name="Notes Placeholder 2"/>
+          <p:cNvSpPr>
+            <a:spLocks noGrp="1"/>
+          </p:cNvSpPr>
+          <p:nvPr>
+            <p:ph type="body" idx="1"/>
+          </p:nvPr>
+        </p:nvSpPr>
+        <p:spPr/>
+        <p:txBody>
+          <a:bodyPr/>
+          <a:lstStyle/>
+          <a:p>
+            <a:r>
+              <a:rPr lang="en-US" dirty="0"/>
+              <a:t/>
+            </a:r>
+            <a:endParaRPr lang="en-US" dirty="0"/>
+          </a:p>
+        </p:txBody>
+      </p:sp>
+      <p:sp>
+        <p:nvSpPr>
+          <p:cNvPr id="4" name="Slide Number Placeholder 3"/>
+          <p:cNvSpPr>
+            <a:spLocks noGrp="1"/>
+          </p:cNvSpPr>
+          <p:nvPr>
+            <p:ph type="sldNum" sz="quarter" idx="10"/>
+          </p:nvPr>
+        </p:nvSpPr>
+        <p:spPr/>
+        <p:txBody>
+          <a:bodyPr/>
+          <a:lstStyle/>
+          <a:p>
+            <a:fld id="{F7021451-1387-4CA6-816F-3879F97B5CBC}" type="slidenum">
+              <a:rPr lang="en-US"/>
+              <a:t>11</a:t>
             </a:fld>
             <a:endParaRPr lang="en-US"/>
           </a:p>
@@ -2523,6 +2612,954 @@
     <p:bg>
       <p:bgPr>
         <a:solidFill>
+          <a:srgbClr val="F4F9FD"/>
+        </a:solidFill>
+      </p:bgPr>
+    </p:bg>
+    <p:spTree>
+      <p:nvGrpSpPr>
+        <p:cNvPr id="1" name=""/>
+        <p:cNvGrpSpPr/>
+        <p:nvPr/>
+      </p:nvGrpSpPr>
+      <p:grpSpPr>
+        <a:xfrm>
+          <a:off x="0" y="0"/>
+          <a:ext cx="0" cy="0"/>
+          <a:chOff x="0" y="0"/>
+          <a:chExt cx="0" cy="0"/>
+        </a:xfrm>
+      </p:grpSpPr>
+      <p:sp>
+        <p:nvSpPr>
+          <p:cNvPr id="2" name="Shape 0"/>
+          <p:cNvSpPr/>
+          <p:nvPr/>
+        </p:nvSpPr>
+        <p:spPr>
+          <a:xfrm>
+            <a:off x="566928" y="420624"/>
+            <a:ext cx="402336" cy="402336"/>
+          </a:xfrm>
+          <a:prstGeom prst="ellipse">
+            <a:avLst/>
+          </a:prstGeom>
+          <a:solidFill>
+            <a:srgbClr val="5B9BD1"/>
+          </a:solidFill>
+          <a:ln/>
+        </p:spPr>
+      </p:sp>
+      <p:sp>
+        <p:nvSpPr>
+          <p:cNvPr id="3" name="Text 1"/>
+          <p:cNvSpPr/>
+          <p:nvPr/>
+        </p:nvSpPr>
+        <p:spPr>
+          <a:xfrm>
+            <a:off x="566928" y="420624"/>
+            <a:ext cx="402336" cy="402336"/>
+          </a:xfrm>
+          <a:prstGeom prst="rect">
+            <a:avLst/>
+          </a:prstGeom>
+          <a:noFill/>
+          <a:ln/>
+        </p:spPr>
+        <p:txBody>
+          <a:bodyPr wrap="square" lIns="0" tIns="0" rIns="0" bIns="0" rtlCol="0" anchor="ctr"/>
+          <a:lstStyle/>
+          <a:p>
+            <a:pPr algn="ctr" indent="0" marL="0">
+              <a:buNone/>
+            </a:pPr>
+            <a:r>
+              <a:rPr lang="en-US" sz="1400" b="1" dirty="0">
+                <a:solidFill>
+                  <a:srgbClr val="FFFFFF"/>
+                </a:solidFill>
+                <a:latin typeface="Calibri" pitchFamily="34" charset="0"/>
+                <a:ea typeface="Calibri" pitchFamily="34" charset="-122"/>
+                <a:cs typeface="Calibri" pitchFamily="34" charset="-120"/>
+              </a:rPr>
+              <a:t>10</a:t>
+            </a:r>
+            <a:endParaRPr lang="en-US" sz="1400" dirty="0"/>
+          </a:p>
+        </p:txBody>
+      </p:sp>
+      <p:sp>
+        <p:nvSpPr>
+          <p:cNvPr id="4" name="Text 2"/>
+          <p:cNvSpPr/>
+          <p:nvPr/>
+        </p:nvSpPr>
+        <p:spPr>
+          <a:xfrm>
+            <a:off x="1097280" y="420624"/>
+            <a:ext cx="7315200" cy="402336"/>
+          </a:xfrm>
+          <a:prstGeom prst="rect">
+            <a:avLst/>
+          </a:prstGeom>
+          <a:noFill/>
+          <a:ln/>
+        </p:spPr>
+        <p:txBody>
+          <a:bodyPr wrap="square" lIns="0" tIns="0" rIns="0" bIns="0" rtlCol="0" anchor="ctr"/>
+          <a:lstStyle/>
+          <a:p>
+            <a:pPr indent="0" marL="0">
+              <a:buNone/>
+            </a:pPr>
+            <a:r>
+              <a:rPr lang="en-US" sz="1100" spc="200" kern="0" dirty="0">
+                <a:solidFill>
+                  <a:srgbClr val="5A7186"/>
+                </a:solidFill>
+                <a:latin typeface="Calibri" pitchFamily="34" charset="0"/>
+                <a:ea typeface="Calibri" pitchFamily="34" charset="-122"/>
+                <a:cs typeface="Calibri" pitchFamily="34" charset="-120"/>
+              </a:rPr>
+              <a:t>WHAT IT RETURNS</a:t>
+            </a:r>
+            <a:endParaRPr lang="en-US" sz="1100" dirty="0"/>
+          </a:p>
+        </p:txBody>
+      </p:sp>
+      <p:sp>
+        <p:nvSpPr>
+          <p:cNvPr id="5" name="Text 3"/>
+          <p:cNvSpPr/>
+          <p:nvPr/>
+        </p:nvSpPr>
+        <p:spPr>
+          <a:xfrm>
+            <a:off x="566928" y="950976"/>
+            <a:ext cx="11064240" cy="822960"/>
+          </a:xfrm>
+          <a:prstGeom prst="rect">
+            <a:avLst/>
+          </a:prstGeom>
+          <a:noFill/>
+          <a:ln/>
+        </p:spPr>
+        <p:txBody>
+          <a:bodyPr wrap="square" lIns="0" tIns="0" rIns="0" bIns="0" rtlCol="0" anchor="ctr"/>
+          <a:lstStyle/>
+          <a:p>
+            <a:pPr indent="0" marL="0">
+              <a:buNone/>
+            </a:pPr>
+            <a:r>
+              <a:rPr lang="en-US" sz="3600" b="1" dirty="0">
+                <a:solidFill>
+                  <a:srgbClr val="22384C"/>
+                </a:solidFill>
+                <a:latin typeface="Georgia" pitchFamily="34" charset="0"/>
+                <a:ea typeface="Georgia" pitchFamily="34" charset="-122"/>
+                <a:cs typeface="Georgia" pitchFamily="34" charset="-120"/>
+              </a:rPr>
+              <a:t>What Sarah gets back</a:t>
+            </a:r>
+            <a:endParaRPr lang="en-US" sz="3600" dirty="0"/>
+          </a:p>
+        </p:txBody>
+      </p:sp>
+      <p:sp>
+        <p:nvSpPr>
+          <p:cNvPr id="6" name="Shape 4"/>
+          <p:cNvSpPr/>
+          <p:nvPr/>
+        </p:nvSpPr>
+        <p:spPr>
+          <a:xfrm>
+            <a:off x="566928" y="1865376"/>
+            <a:ext cx="3547872" cy="2249424"/>
+          </a:xfrm>
+          <a:prstGeom prst="roundRect">
+            <a:avLst>
+              <a:gd name="adj" fmla="val 4065"/>
+            </a:avLst>
+          </a:prstGeom>
+          <a:solidFill>
+            <a:srgbClr val="FFFFFF"/>
+          </a:solidFill>
+          <a:ln w="12700">
+            <a:solidFill>
+              <a:srgbClr val="DCE6EF"/>
+            </a:solidFill>
+            <a:prstDash val="solid"/>
+          </a:ln>
+        </p:spPr>
+      </p:sp>
+      <p:sp>
+        <p:nvSpPr>
+          <p:cNvPr id="7" name="Shape 5"/>
+          <p:cNvSpPr/>
+          <p:nvPr/>
+        </p:nvSpPr>
+        <p:spPr>
+          <a:xfrm>
+            <a:off x="566928" y="1865376"/>
+            <a:ext cx="3547872" cy="73152"/>
+          </a:xfrm>
+          <a:prstGeom prst="rect">
+            <a:avLst/>
+          </a:prstGeom>
+          <a:solidFill>
+            <a:srgbClr val="5B9BD1"/>
+          </a:solidFill>
+          <a:ln/>
+        </p:spPr>
+      </p:sp>
+      <p:sp>
+        <p:nvSpPr>
+          <p:cNvPr id="8" name="Text 6"/>
+          <p:cNvSpPr/>
+          <p:nvPr/>
+        </p:nvSpPr>
+        <p:spPr>
+          <a:xfrm>
+            <a:off x="822960" y="2066544"/>
+            <a:ext cx="3035808" cy="256032"/>
+          </a:xfrm>
+          <a:prstGeom prst="rect">
+            <a:avLst/>
+          </a:prstGeom>
+          <a:noFill/>
+          <a:ln/>
+        </p:spPr>
+        <p:txBody>
+          <a:bodyPr wrap="square" lIns="0" tIns="0" rIns="0" bIns="0" rtlCol="0" anchor="ctr"/>
+          <a:lstStyle/>
+          <a:p>
+            <a:pPr indent="0" marL="0">
+              <a:buNone/>
+            </a:pPr>
+            <a:r>
+              <a:rPr lang="en-US" sz="1050" b="1" spc="140" kern="0" dirty="0">
+                <a:solidFill>
+                  <a:srgbClr val="3276B1"/>
+                </a:solidFill>
+                <a:latin typeface="Calibri" pitchFamily="34" charset="0"/>
+                <a:ea typeface="Calibri" pitchFamily="34" charset="-122"/>
+                <a:cs typeface="Calibri" pitchFamily="34" charset="-120"/>
+              </a:rPr>
+              <a:t>THE TIME</a:t>
+            </a:r>
+            <a:endParaRPr lang="en-US" sz="1050" dirty="0"/>
+          </a:p>
+        </p:txBody>
+      </p:sp>
+      <p:sp>
+        <p:nvSpPr>
+          <p:cNvPr id="9" name="Text 7"/>
+          <p:cNvSpPr/>
+          <p:nvPr/>
+        </p:nvSpPr>
+        <p:spPr>
+          <a:xfrm>
+            <a:off x="822960" y="2395728"/>
+            <a:ext cx="3035808" cy="694944"/>
+          </a:xfrm>
+          <a:prstGeom prst="rect">
+            <a:avLst/>
+          </a:prstGeom>
+          <a:noFill/>
+          <a:ln/>
+        </p:spPr>
+        <p:txBody>
+          <a:bodyPr wrap="square" lIns="0" tIns="0" rIns="0" bIns="0" rtlCol="0" anchor="ctr"/>
+          <a:lstStyle/>
+          <a:p>
+            <a:pPr indent="0" marL="0">
+              <a:buNone/>
+            </a:pPr>
+            <a:r>
+              <a:rPr lang="en-US" sz="4000" b="1" dirty="0">
+                <a:solidFill>
+                  <a:srgbClr val="22384C"/>
+                </a:solidFill>
+                <a:latin typeface="Georgia" pitchFamily="34" charset="0"/>
+                <a:ea typeface="Georgia" pitchFamily="34" charset="-122"/>
+                <a:cs typeface="Georgia" pitchFamily="34" charset="-120"/>
+              </a:rPr>
+              <a:t>7 h</a:t>
+            </a:r>
+            <a:endParaRPr lang="en-US" sz="4000" dirty="0"/>
+          </a:p>
+        </p:txBody>
+      </p:sp>
+      <p:sp>
+        <p:nvSpPr>
+          <p:cNvPr id="10" name="Text 8"/>
+          <p:cNvSpPr/>
+          <p:nvPr/>
+        </p:nvSpPr>
+        <p:spPr>
+          <a:xfrm>
+            <a:off x="822960" y="3127248"/>
+            <a:ext cx="3035808" cy="292608"/>
+          </a:xfrm>
+          <a:prstGeom prst="rect">
+            <a:avLst/>
+          </a:prstGeom>
+          <a:noFill/>
+          <a:ln/>
+        </p:spPr>
+        <p:txBody>
+          <a:bodyPr wrap="square" lIns="0" tIns="0" rIns="0" bIns="0" rtlCol="0" anchor="ctr"/>
+          <a:lstStyle/>
+          <a:p>
+            <a:pPr indent="0" marL="0">
+              <a:buNone/>
+            </a:pPr>
+            <a:r>
+              <a:rPr lang="en-US" sz="1350" dirty="0">
+                <a:solidFill>
+                  <a:srgbClr val="22384C"/>
+                </a:solidFill>
+                <a:latin typeface="Calibri" pitchFamily="34" charset="0"/>
+                <a:ea typeface="Calibri" pitchFamily="34" charset="-122"/>
+                <a:cs typeface="Calibri" pitchFamily="34" charset="-120"/>
+              </a:rPr>
+              <a:t>a week, handed back</a:t>
+            </a:r>
+            <a:endParaRPr lang="en-US" sz="1350" dirty="0"/>
+          </a:p>
+        </p:txBody>
+      </p:sp>
+      <p:sp>
+        <p:nvSpPr>
+          <p:cNvPr id="11" name="Text 9"/>
+          <p:cNvSpPr/>
+          <p:nvPr/>
+        </p:nvSpPr>
+        <p:spPr>
+          <a:xfrm>
+            <a:off x="822960" y="3456432"/>
+            <a:ext cx="3035808" cy="457200"/>
+          </a:xfrm>
+          <a:prstGeom prst="rect">
+            <a:avLst/>
+          </a:prstGeom>
+          <a:noFill/>
+          <a:ln/>
+        </p:spPr>
+        <p:txBody>
+          <a:bodyPr wrap="square" lIns="0" tIns="0" rIns="0" bIns="0" rtlCol="0" anchor="ctr"/>
+          <a:lstStyle/>
+          <a:p>
+            <a:pPr indent="0" marL="0">
+              <a:lnSpc>
+                <a:spcPts val="1400"/>
+              </a:lnSpc>
+              <a:buNone/>
+            </a:pPr>
+            <a:r>
+              <a:rPr lang="en-US" sz="1050" dirty="0">
+                <a:solidFill>
+                  <a:srgbClr val="5A7186"/>
+                </a:solidFill>
+                <a:latin typeface="Calibri" pitchFamily="34" charset="0"/>
+                <a:ea typeface="Calibri" pitchFamily="34" charset="-122"/>
+                <a:cs typeface="Calibri" pitchFamily="34" charset="-120"/>
+              </a:rPr>
+              <a:t>About 375 hours a year. An estimate of what these jobs take by hand.</a:t>
+            </a:r>
+            <a:endParaRPr lang="en-US" sz="1050" dirty="0"/>
+          </a:p>
+        </p:txBody>
+      </p:sp>
+      <p:sp>
+        <p:nvSpPr>
+          <p:cNvPr id="12" name="Shape 10"/>
+          <p:cNvSpPr/>
+          <p:nvPr/>
+        </p:nvSpPr>
+        <p:spPr>
+          <a:xfrm>
+            <a:off x="4315968" y="1865376"/>
+            <a:ext cx="3547872" cy="2249424"/>
+          </a:xfrm>
+          <a:prstGeom prst="roundRect">
+            <a:avLst>
+              <a:gd name="adj" fmla="val 4065"/>
+            </a:avLst>
+          </a:prstGeom>
+          <a:solidFill>
+            <a:srgbClr val="FFFFFF"/>
+          </a:solidFill>
+          <a:ln w="12700">
+            <a:solidFill>
+              <a:srgbClr val="DCE6EF"/>
+            </a:solidFill>
+            <a:prstDash val="solid"/>
+          </a:ln>
+        </p:spPr>
+      </p:sp>
+      <p:sp>
+        <p:nvSpPr>
+          <p:cNvPr id="13" name="Shape 11"/>
+          <p:cNvSpPr/>
+          <p:nvPr/>
+        </p:nvSpPr>
+        <p:spPr>
+          <a:xfrm>
+            <a:off x="4315968" y="1865376"/>
+            <a:ext cx="3547872" cy="73152"/>
+          </a:xfrm>
+          <a:prstGeom prst="rect">
+            <a:avLst/>
+          </a:prstGeom>
+          <a:solidFill>
+            <a:srgbClr val="5B9BD1"/>
+          </a:solidFill>
+          <a:ln/>
+        </p:spPr>
+      </p:sp>
+      <p:sp>
+        <p:nvSpPr>
+          <p:cNvPr id="14" name="Text 12"/>
+          <p:cNvSpPr/>
+          <p:nvPr/>
+        </p:nvSpPr>
+        <p:spPr>
+          <a:xfrm>
+            <a:off x="4572000" y="2066544"/>
+            <a:ext cx="3035808" cy="256032"/>
+          </a:xfrm>
+          <a:prstGeom prst="rect">
+            <a:avLst/>
+          </a:prstGeom>
+          <a:noFill/>
+          <a:ln/>
+        </p:spPr>
+        <p:txBody>
+          <a:bodyPr wrap="square" lIns="0" tIns="0" rIns="0" bIns="0" rtlCol="0" anchor="ctr"/>
+          <a:lstStyle/>
+          <a:p>
+            <a:pPr indent="0" marL="0">
+              <a:buNone/>
+            </a:pPr>
+            <a:r>
+              <a:rPr lang="en-US" sz="1050" b="1" spc="140" kern="0" dirty="0">
+                <a:solidFill>
+                  <a:srgbClr val="3276B1"/>
+                </a:solidFill>
+                <a:latin typeface="Calibri" pitchFamily="34" charset="0"/>
+                <a:ea typeface="Calibri" pitchFamily="34" charset="-122"/>
+                <a:cs typeface="Calibri" pitchFamily="34" charset="-120"/>
+              </a:rPr>
+              <a:t>THE MONEY</a:t>
+            </a:r>
+            <a:endParaRPr lang="en-US" sz="1050" dirty="0"/>
+          </a:p>
+        </p:txBody>
+      </p:sp>
+      <p:sp>
+        <p:nvSpPr>
+          <p:cNvPr id="15" name="Text 13"/>
+          <p:cNvSpPr/>
+          <p:nvPr/>
+        </p:nvSpPr>
+        <p:spPr>
+          <a:xfrm>
+            <a:off x="4572000" y="2395728"/>
+            <a:ext cx="3035808" cy="694944"/>
+          </a:xfrm>
+          <a:prstGeom prst="rect">
+            <a:avLst/>
+          </a:prstGeom>
+          <a:noFill/>
+          <a:ln/>
+        </p:spPr>
+        <p:txBody>
+          <a:bodyPr wrap="square" lIns="0" tIns="0" rIns="0" bIns="0" rtlCol="0" anchor="ctr"/>
+          <a:lstStyle/>
+          <a:p>
+            <a:pPr indent="0" marL="0">
+              <a:buNone/>
+            </a:pPr>
+            <a:r>
+              <a:rPr lang="en-US" sz="4000" b="1" dirty="0">
+                <a:solidFill>
+                  <a:srgbClr val="22384C"/>
+                </a:solidFill>
+                <a:latin typeface="Georgia" pitchFamily="34" charset="0"/>
+                <a:ea typeface="Georgia" pitchFamily="34" charset="-122"/>
+                <a:cs typeface="Georgia" pitchFamily="34" charset="-120"/>
+              </a:rPr>
+              <a:t>€5,000</a:t>
+            </a:r>
+            <a:endParaRPr lang="en-US" sz="4000" dirty="0"/>
+          </a:p>
+        </p:txBody>
+      </p:sp>
+      <p:sp>
+        <p:nvSpPr>
+          <p:cNvPr id="16" name="Text 14"/>
+          <p:cNvSpPr/>
+          <p:nvPr/>
+        </p:nvSpPr>
+        <p:spPr>
+          <a:xfrm>
+            <a:off x="4572000" y="3127248"/>
+            <a:ext cx="3035808" cy="292608"/>
+          </a:xfrm>
+          <a:prstGeom prst="rect">
+            <a:avLst/>
+          </a:prstGeom>
+          <a:noFill/>
+          <a:ln/>
+        </p:spPr>
+        <p:txBody>
+          <a:bodyPr wrap="square" lIns="0" tIns="0" rIns="0" bIns="0" rtlCol="0" anchor="ctr"/>
+          <a:lstStyle/>
+          <a:p>
+            <a:pPr indent="0" marL="0">
+              <a:buNone/>
+            </a:pPr>
+            <a:r>
+              <a:rPr lang="en-US" sz="1350" dirty="0">
+                <a:solidFill>
+                  <a:srgbClr val="22384C"/>
+                </a:solidFill>
+                <a:latin typeface="Calibri" pitchFamily="34" charset="0"/>
+                <a:ea typeface="Calibri" pitchFamily="34" charset="-122"/>
+                <a:cs typeface="Calibri" pitchFamily="34" charset="-120"/>
+              </a:rPr>
+              <a:t>a year, recovered</a:t>
+            </a:r>
+            <a:endParaRPr lang="en-US" sz="1350" dirty="0"/>
+          </a:p>
+        </p:txBody>
+      </p:sp>
+      <p:sp>
+        <p:nvSpPr>
+          <p:cNvPr id="17" name="Text 15"/>
+          <p:cNvSpPr/>
+          <p:nvPr/>
+        </p:nvSpPr>
+        <p:spPr>
+          <a:xfrm>
+            <a:off x="4572000" y="3456432"/>
+            <a:ext cx="3035808" cy="457200"/>
+          </a:xfrm>
+          <a:prstGeom prst="rect">
+            <a:avLst/>
+          </a:prstGeom>
+          <a:noFill/>
+          <a:ln/>
+        </p:spPr>
+        <p:txBody>
+          <a:bodyPr wrap="square" lIns="0" tIns="0" rIns="0" bIns="0" rtlCol="0" anchor="ctr"/>
+          <a:lstStyle/>
+          <a:p>
+            <a:pPr indent="0" marL="0">
+              <a:lnSpc>
+                <a:spcPts val="1400"/>
+              </a:lnSpc>
+              <a:buNone/>
+            </a:pPr>
+            <a:r>
+              <a:rPr lang="en-US" sz="1050" dirty="0">
+                <a:solidFill>
+                  <a:srgbClr val="5A7186"/>
+                </a:solidFill>
+                <a:latin typeface="Calibri" pitchFamily="34" charset="0"/>
+                <a:ea typeface="Calibri" pitchFamily="34" charset="-122"/>
+                <a:cs typeface="Calibri" pitchFamily="34" charset="-120"/>
+              </a:rPr>
+              <a:t>Measured over 120 replayed days. Lost sales fall from €8,321 to €3,690.</a:t>
+            </a:r>
+            <a:endParaRPr lang="en-US" sz="1050" dirty="0"/>
+          </a:p>
+        </p:txBody>
+      </p:sp>
+      <p:sp>
+        <p:nvSpPr>
+          <p:cNvPr id="18" name="Shape 16"/>
+          <p:cNvSpPr/>
+          <p:nvPr/>
+        </p:nvSpPr>
+        <p:spPr>
+          <a:xfrm>
+            <a:off x="8065008" y="1865376"/>
+            <a:ext cx="3566160" cy="2249424"/>
+          </a:xfrm>
+          <a:prstGeom prst="roundRect">
+            <a:avLst>
+              <a:gd name="adj" fmla="val 4065"/>
+            </a:avLst>
+          </a:prstGeom>
+          <a:solidFill>
+            <a:srgbClr val="FFFFFF"/>
+          </a:solidFill>
+          <a:ln w="12700">
+            <a:solidFill>
+              <a:srgbClr val="DCE6EF"/>
+            </a:solidFill>
+            <a:prstDash val="solid"/>
+          </a:ln>
+        </p:spPr>
+      </p:sp>
+      <p:sp>
+        <p:nvSpPr>
+          <p:cNvPr id="19" name="Shape 17"/>
+          <p:cNvSpPr/>
+          <p:nvPr/>
+        </p:nvSpPr>
+        <p:spPr>
+          <a:xfrm>
+            <a:off x="8065008" y="1865376"/>
+            <a:ext cx="3566160" cy="73152"/>
+          </a:xfrm>
+          <a:prstGeom prst="rect">
+            <a:avLst/>
+          </a:prstGeom>
+          <a:solidFill>
+            <a:srgbClr val="CD395F"/>
+          </a:solidFill>
+          <a:ln/>
+        </p:spPr>
+      </p:sp>
+      <p:sp>
+        <p:nvSpPr>
+          <p:cNvPr id="20" name="Text 18"/>
+          <p:cNvSpPr/>
+          <p:nvPr/>
+        </p:nvSpPr>
+        <p:spPr>
+          <a:xfrm>
+            <a:off x="8321040" y="2066544"/>
+            <a:ext cx="3054096" cy="256032"/>
+          </a:xfrm>
+          <a:prstGeom prst="rect">
+            <a:avLst/>
+          </a:prstGeom>
+          <a:noFill/>
+          <a:ln/>
+        </p:spPr>
+        <p:txBody>
+          <a:bodyPr wrap="square" lIns="0" tIns="0" rIns="0" bIns="0" rtlCol="0" anchor="ctr"/>
+          <a:lstStyle/>
+          <a:p>
+            <a:pPr indent="0" marL="0">
+              <a:buNone/>
+            </a:pPr>
+            <a:r>
+              <a:rPr lang="en-US" sz="1050" b="1" spc="140" kern="0" dirty="0">
+                <a:solidFill>
+                  <a:srgbClr val="3276B1"/>
+                </a:solidFill>
+                <a:latin typeface="Calibri" pitchFamily="34" charset="0"/>
+                <a:ea typeface="Calibri" pitchFamily="34" charset="-122"/>
+                <a:cs typeface="Calibri" pitchFamily="34" charset="-120"/>
+              </a:rPr>
+              <a:t>THE COST</a:t>
+            </a:r>
+            <a:endParaRPr lang="en-US" sz="1050" dirty="0"/>
+          </a:p>
+        </p:txBody>
+      </p:sp>
+      <p:sp>
+        <p:nvSpPr>
+          <p:cNvPr id="21" name="Text 19"/>
+          <p:cNvSpPr/>
+          <p:nvPr/>
+        </p:nvSpPr>
+        <p:spPr>
+          <a:xfrm>
+            <a:off x="8321040" y="2395728"/>
+            <a:ext cx="3054096" cy="694944"/>
+          </a:xfrm>
+          <a:prstGeom prst="rect">
+            <a:avLst/>
+          </a:prstGeom>
+          <a:noFill/>
+          <a:ln/>
+        </p:spPr>
+        <p:txBody>
+          <a:bodyPr wrap="square" lIns="0" tIns="0" rIns="0" bIns="0" rtlCol="0" anchor="ctr"/>
+          <a:lstStyle/>
+          <a:p>
+            <a:pPr indent="0" marL="0">
+              <a:buNone/>
+            </a:pPr>
+            <a:r>
+              <a:rPr lang="en-US" sz="4000" b="1" dirty="0">
+                <a:solidFill>
+                  <a:srgbClr val="22384C"/>
+                </a:solidFill>
+                <a:latin typeface="Georgia" pitchFamily="34" charset="0"/>
+                <a:ea typeface="Georgia" pitchFamily="34" charset="-122"/>
+                <a:cs typeface="Georgia" pitchFamily="34" charset="-120"/>
+              </a:rPr>
+              <a:t>$25</a:t>
+            </a:r>
+            <a:endParaRPr lang="en-US" sz="4000" dirty="0"/>
+          </a:p>
+        </p:txBody>
+      </p:sp>
+      <p:sp>
+        <p:nvSpPr>
+          <p:cNvPr id="22" name="Text 20"/>
+          <p:cNvSpPr/>
+          <p:nvPr/>
+        </p:nvSpPr>
+        <p:spPr>
+          <a:xfrm>
+            <a:off x="8321040" y="3127248"/>
+            <a:ext cx="3054096" cy="292608"/>
+          </a:xfrm>
+          <a:prstGeom prst="rect">
+            <a:avLst/>
+          </a:prstGeom>
+          <a:noFill/>
+          <a:ln/>
+        </p:spPr>
+        <p:txBody>
+          <a:bodyPr wrap="square" lIns="0" tIns="0" rIns="0" bIns="0" rtlCol="0" anchor="ctr"/>
+          <a:lstStyle/>
+          <a:p>
+            <a:pPr indent="0" marL="0">
+              <a:buNone/>
+            </a:pPr>
+            <a:r>
+              <a:rPr lang="en-US" sz="1350" dirty="0">
+                <a:solidFill>
+                  <a:srgbClr val="22384C"/>
+                </a:solidFill>
+                <a:latin typeface="Calibri" pitchFamily="34" charset="0"/>
+                <a:ea typeface="Calibri" pitchFamily="34" charset="-122"/>
+                <a:cs typeface="Calibri" pitchFamily="34" charset="-120"/>
+              </a:rPr>
+              <a:t>a year, to run it</a:t>
+            </a:r>
+            <a:endParaRPr lang="en-US" sz="1350" dirty="0"/>
+          </a:p>
+        </p:txBody>
+      </p:sp>
+      <p:sp>
+        <p:nvSpPr>
+          <p:cNvPr id="23" name="Text 21"/>
+          <p:cNvSpPr/>
+          <p:nvPr/>
+        </p:nvSpPr>
+        <p:spPr>
+          <a:xfrm>
+            <a:off x="8321040" y="3456432"/>
+            <a:ext cx="3054096" cy="457200"/>
+          </a:xfrm>
+          <a:prstGeom prst="rect">
+            <a:avLst/>
+          </a:prstGeom>
+          <a:noFill/>
+          <a:ln/>
+        </p:spPr>
+        <p:txBody>
+          <a:bodyPr wrap="square" lIns="0" tIns="0" rIns="0" bIns="0" rtlCol="0" anchor="ctr"/>
+          <a:lstStyle/>
+          <a:p>
+            <a:pPr indent="0" marL="0">
+              <a:lnSpc>
+                <a:spcPts val="1400"/>
+              </a:lnSpc>
+              <a:buNone/>
+            </a:pPr>
+            <a:r>
+              <a:rPr lang="en-US" sz="1050" dirty="0">
+                <a:solidFill>
+                  <a:srgbClr val="5A7186"/>
+                </a:solidFill>
+                <a:latin typeface="Calibri" pitchFamily="34" charset="0"/>
+                <a:ea typeface="Calibri" pitchFamily="34" charset="-122"/>
+                <a:cs typeface="Calibri" pitchFamily="34" charset="-120"/>
+              </a:rPr>
+              <a:t>Two wakings a day, about 6,500 tokens each. Measured from the real tool output.</a:t>
+            </a:r>
+            <a:endParaRPr lang="en-US" sz="1050" dirty="0"/>
+          </a:p>
+        </p:txBody>
+      </p:sp>
+      <p:sp>
+        <p:nvSpPr>
+          <p:cNvPr id="24" name="Shape 22"/>
+          <p:cNvSpPr/>
+          <p:nvPr/>
+        </p:nvSpPr>
+        <p:spPr>
+          <a:xfrm>
+            <a:off x="566928" y="4334256"/>
+            <a:ext cx="11064240" cy="1188720"/>
+          </a:xfrm>
+          <a:prstGeom prst="roundRect">
+            <a:avLst>
+              <a:gd name="adj" fmla="val 7692"/>
+            </a:avLst>
+          </a:prstGeom>
+          <a:solidFill>
+            <a:srgbClr val="E7EFF7"/>
+          </a:solidFill>
+          <a:ln/>
+        </p:spPr>
+      </p:sp>
+      <p:sp>
+        <p:nvSpPr>
+          <p:cNvPr id="25" name="Text 23"/>
+          <p:cNvSpPr/>
+          <p:nvPr/>
+        </p:nvSpPr>
+        <p:spPr>
+          <a:xfrm>
+            <a:off x="914400" y="4480560"/>
+            <a:ext cx="10424160" cy="365760"/>
+          </a:xfrm>
+          <a:prstGeom prst="rect">
+            <a:avLst/>
+          </a:prstGeom>
+          <a:noFill/>
+          <a:ln/>
+        </p:spPr>
+        <p:txBody>
+          <a:bodyPr wrap="square" lIns="0" tIns="0" rIns="0" bIns="0" rtlCol="0" anchor="ctr"/>
+          <a:lstStyle/>
+          <a:p>
+            <a:pPr indent="0" marL="0">
+              <a:buNone/>
+            </a:pPr>
+            <a:r>
+              <a:rPr lang="en-US" sz="1400" dirty="0">
+                <a:solidFill>
+                  <a:srgbClr val="22384C"/>
+                </a:solidFill>
+                <a:latin typeface="Calibri" pitchFamily="34" charset="0"/>
+                <a:ea typeface="Calibri" pitchFamily="34" charset="-122"/>
+                <a:cs typeface="Calibri" pitchFamily="34" charset="-120"/>
+              </a:rPr>
+              <a:t>Lost sales down 56%. Waste goes up a little, and that is correct: it buys availability with flour.</a:t>
+            </a:r>
+            <a:endParaRPr lang="en-US" sz="1400" dirty="0"/>
+          </a:p>
+        </p:txBody>
+      </p:sp>
+      <p:sp>
+        <p:nvSpPr>
+          <p:cNvPr id="26" name="Text 24"/>
+          <p:cNvSpPr/>
+          <p:nvPr/>
+        </p:nvSpPr>
+        <p:spPr>
+          <a:xfrm>
+            <a:off x="914400" y="4901184"/>
+            <a:ext cx="10424160" cy="365760"/>
+          </a:xfrm>
+          <a:prstGeom prst="rect">
+            <a:avLst/>
+          </a:prstGeom>
+          <a:noFill/>
+          <a:ln/>
+        </p:spPr>
+        <p:txBody>
+          <a:bodyPr wrap="square" lIns="0" tIns="0" rIns="0" bIns="0" rtlCol="0" anchor="ctr"/>
+          <a:lstStyle/>
+          <a:p>
+            <a:pPr indent="0" marL="0">
+              <a:buNone/>
+            </a:pPr>
+            <a:r>
+              <a:rPr lang="en-US" sz="1400" dirty="0">
+                <a:solidFill>
+                  <a:srgbClr val="22384C"/>
+                </a:solidFill>
+                <a:latin typeface="Calibri" pitchFamily="34" charset="0"/>
+                <a:ea typeface="Calibri" pitchFamily="34" charset="-122"/>
+                <a:cs typeface="Calibri" pitchFamily="34" charset="-120"/>
+              </a:rPr>
+              <a:t>Better than the current method on 65 days out of 120. The calculation that never got done now happens every night.</a:t>
+            </a:r>
+            <a:endParaRPr lang="en-US" sz="1400" dirty="0"/>
+          </a:p>
+        </p:txBody>
+      </p:sp>
+      <p:sp>
+        <p:nvSpPr>
+          <p:cNvPr id="27" name="Shape 25"/>
+          <p:cNvSpPr/>
+          <p:nvPr/>
+        </p:nvSpPr>
+        <p:spPr>
+          <a:xfrm>
+            <a:off x="566928" y="5724144"/>
+            <a:ext cx="11064240" cy="859536"/>
+          </a:xfrm>
+          <a:prstGeom prst="roundRect">
+            <a:avLst>
+              <a:gd name="adj" fmla="val 10638"/>
+            </a:avLst>
+          </a:prstGeom>
+          <a:solidFill>
+            <a:srgbClr val="22384C"/>
+          </a:solidFill>
+          <a:ln/>
+        </p:spPr>
+      </p:sp>
+      <p:sp>
+        <p:nvSpPr>
+          <p:cNvPr id="28" name="Text 26"/>
+          <p:cNvSpPr/>
+          <p:nvPr/>
+        </p:nvSpPr>
+        <p:spPr>
+          <a:xfrm>
+            <a:off x="566928" y="5724144"/>
+            <a:ext cx="11064240" cy="859536"/>
+          </a:xfrm>
+          <a:prstGeom prst="rect">
+            <a:avLst/>
+          </a:prstGeom>
+          <a:noFill/>
+          <a:ln/>
+        </p:spPr>
+        <p:txBody>
+          <a:bodyPr wrap="square" lIns="0" tIns="0" rIns="0" bIns="0" rtlCol="0" anchor="ctr"/>
+          <a:lstStyle/>
+          <a:p>
+            <a:pPr algn="ctr" indent="0" marL="0">
+              <a:buNone/>
+            </a:pPr>
+            <a:r>
+              <a:rPr lang="en-US" sz="2200" b="1" dirty="0">
+                <a:solidFill>
+                  <a:srgbClr val="FFFFFF"/>
+                </a:solidFill>
+                <a:latin typeface="Georgia" pitchFamily="34" charset="0"/>
+                <a:ea typeface="Georgia" pitchFamily="34" charset="-122"/>
+                <a:cs typeface="Georgia" pitchFamily="34" charset="-120"/>
+              </a:rPr>
+              <a:t>Five thousand euros back, for twenty-five dollars of arithmetic.</a:t>
+            </a:r>
+            <a:endParaRPr lang="en-US" sz="2200" dirty="0"/>
+          </a:p>
+        </p:txBody>
+      </p:sp>
+    </p:spTree>
+  </p:cSld>
+  <p:clrMapOvr>
+    <a:masterClrMapping/>
+  </p:clrMapOvr>
+</p:sld>
+</file>
+
+<file path=ppt/slides/slide11.xml><?xml version="1.0" encoding="utf-8"?>
+<p:sld xmlns:a="http://schemas.openxmlformats.org/drawingml/2006/main" xmlns:r="http://schemas.openxmlformats.org/officeDocument/2006/relationships" xmlns:p="http://schemas.openxmlformats.org/presentationml/2006/main">
+  <p:cSld name="Slide 11">
+    <p:bg>
+      <p:bgPr>
+        <a:solidFill>
           <a:srgbClr val="22384C"/>
         </a:solidFill>
       </p:bgPr>
@@ -6803,7 +7840,7 @@
                 <a:ea typeface="Calibri" pitchFamily="34" charset="-122"/>
                 <a:cs typeface="Calibri" pitchFamily="34" charset="-120"/>
               </a:rPr>
-              <a:t>THE STACK</a:t>
+              <a:t>THE ARCHITECTURE</a:t>
             </a:r>
             <a:endParaRPr lang="en-US" sz="1100" dirty="0"/>
           </a:p>
@@ -6842,7 +7879,7 @@
                 <a:ea typeface="Georgia" pitchFamily="34" charset="-122"/>
                 <a:cs typeface="Georgia" pitchFamily="34" charset="-120"/>
               </a:rPr>
-              <a:t>What it runs on</a:t>
+              <a:t>How it holds together</a:t>
             </a:r>
             <a:endParaRPr lang="en-US" sz="3600" dirty="0"/>
           </a:p>
@@ -6850,30 +7887,57 @@
       </p:sp>
       <p:sp>
         <p:nvSpPr>
-          <p:cNvPr id="6" name="Text 4"/>
-          <p:cNvSpPr/>
-          <p:nvPr/>
-        </p:nvSpPr>
-        <p:spPr>
-          <a:xfrm>
-            <a:off x="566928" y="1883664"/>
-            <a:ext cx="5303520" cy="274320"/>
-          </a:xfrm>
-          <a:prstGeom prst="rect">
-            <a:avLst/>
-          </a:prstGeom>
-          <a:noFill/>
-          <a:ln/>
-        </p:spPr>
-        <p:txBody>
-          <a:bodyPr wrap="square" lIns="0" tIns="0" rIns="0" bIns="0" rtlCol="0" anchor="ctr"/>
-          <a:lstStyle/>
-          <a:p>
-            <a:pPr indent="0" marL="0">
-              <a:buNone/>
-            </a:pPr>
-            <a:r>
-              <a:rPr lang="en-US" sz="1200" b="1" spc="200" kern="0" dirty="0">
+          <p:cNvPr id="6" name="Shape 4"/>
+          <p:cNvSpPr/>
+          <p:nvPr/>
+        </p:nvSpPr>
+        <p:spPr>
+          <a:xfrm>
+            <a:off x="566928" y="1792224"/>
+            <a:ext cx="3200400" cy="3200400"/>
+          </a:xfrm>
+          <a:prstGeom prst="roundRect">
+            <a:avLst>
+              <a:gd name="adj" fmla="val 2286"/>
+            </a:avLst>
+          </a:prstGeom>
+          <a:solidFill>
+            <a:srgbClr val="E7EFF7"/>
+          </a:solidFill>
+          <a:ln w="12700">
+            <a:solidFill>
+              <a:srgbClr val="DCE6EF"/>
+            </a:solidFill>
+            <a:prstDash val="solid"/>
+          </a:ln>
+        </p:spPr>
+      </p:sp>
+      <p:sp>
+        <p:nvSpPr>
+          <p:cNvPr id="7" name="Text 5"/>
+          <p:cNvSpPr/>
+          <p:nvPr/>
+        </p:nvSpPr>
+        <p:spPr>
+          <a:xfrm>
+            <a:off x="768096" y="1901952"/>
+            <a:ext cx="2798064" cy="274320"/>
+          </a:xfrm>
+          <a:prstGeom prst="rect">
+            <a:avLst/>
+          </a:prstGeom>
+          <a:noFill/>
+          <a:ln/>
+        </p:spPr>
+        <p:txBody>
+          <a:bodyPr wrap="square" lIns="0" tIns="0" rIns="0" bIns="0" rtlCol="0" anchor="ctr"/>
+          <a:lstStyle/>
+          <a:p>
+            <a:pPr indent="0" marL="0">
+              <a:buNone/>
+            </a:pPr>
+            <a:r>
+              <a:rPr lang="en-US" sz="1100" b="1" spc="160" kern="0" dirty="0">
                 <a:solidFill>
                   <a:srgbClr val="3276B1"/>
                 </a:solidFill>
@@ -6881,58 +7945,65 @@
                 <a:ea typeface="Calibri" pitchFamily="34" charset="-122"/>
                 <a:cs typeface="Calibri" pitchFamily="34" charset="-120"/>
               </a:rPr>
-              <a:t>RUNNING</a:t>
-            </a:r>
-            <a:endParaRPr lang="en-US" sz="1200" dirty="0"/>
-          </a:p>
-        </p:txBody>
-      </p:sp>
-      <p:sp>
-        <p:nvSpPr>
-          <p:cNvPr id="7" name="Shape 5"/>
-          <p:cNvSpPr/>
-          <p:nvPr/>
-        </p:nvSpPr>
-        <p:spPr>
-          <a:xfrm>
-            <a:off x="566928" y="2359152"/>
-            <a:ext cx="274320" cy="274320"/>
-          </a:xfrm>
-          <a:prstGeom prst="ellipse">
-            <a:avLst/>
+              <a:t>THE SHOP</a:t>
+            </a:r>
+            <a:endParaRPr lang="en-US" sz="1100" dirty="0"/>
+          </a:p>
+        </p:txBody>
+      </p:sp>
+      <p:sp>
+        <p:nvSpPr>
+          <p:cNvPr id="8" name="Shape 6"/>
+          <p:cNvSpPr/>
+          <p:nvPr/>
+        </p:nvSpPr>
+        <p:spPr>
+          <a:xfrm>
+            <a:off x="786384" y="2286000"/>
+            <a:ext cx="2743200" cy="676656"/>
+          </a:xfrm>
+          <a:prstGeom prst="roundRect">
+            <a:avLst>
+              <a:gd name="adj" fmla="val 8108"/>
+            </a:avLst>
           </a:prstGeom>
           <a:solidFill>
-            <a:srgbClr val="5B9BD1"/>
+            <a:srgbClr val="FFFFFF"/>
           </a:solidFill>
-          <a:ln/>
-        </p:spPr>
-      </p:sp>
-      <p:sp>
-        <p:nvSpPr>
-          <p:cNvPr id="8" name="Text 6"/>
-          <p:cNvSpPr/>
-          <p:nvPr/>
-        </p:nvSpPr>
-        <p:spPr>
-          <a:xfrm>
-            <a:off x="987552" y="2304288"/>
-            <a:ext cx="4846320" cy="329184"/>
-          </a:xfrm>
-          <a:prstGeom prst="rect">
-            <a:avLst/>
-          </a:prstGeom>
-          <a:noFill/>
-          <a:ln/>
-        </p:spPr>
-        <p:txBody>
-          <a:bodyPr wrap="square" lIns="0" tIns="0" rIns="0" bIns="0" rtlCol="0" anchor="ctr"/>
-          <a:lstStyle/>
-          <a:p>
-            <a:pPr indent="0" marL="0">
-              <a:buNone/>
-            </a:pPr>
-            <a:r>
-              <a:rPr lang="en-US" sz="1550" b="1" dirty="0">
+          <a:ln w="12700">
+            <a:solidFill>
+              <a:srgbClr val="DCE6EF"/>
+            </a:solidFill>
+            <a:prstDash val="solid"/>
+          </a:ln>
+        </p:spPr>
+      </p:sp>
+      <p:sp>
+        <p:nvSpPr>
+          <p:cNvPr id="9" name="Text 7"/>
+          <p:cNvSpPr/>
+          <p:nvPr/>
+        </p:nvSpPr>
+        <p:spPr>
+          <a:xfrm>
+            <a:off x="914400" y="2350008"/>
+            <a:ext cx="2468880" cy="256032"/>
+          </a:xfrm>
+          <a:prstGeom prst="rect">
+            <a:avLst/>
+          </a:prstGeom>
+          <a:noFill/>
+          <a:ln/>
+        </p:spPr>
+        <p:txBody>
+          <a:bodyPr wrap="square" lIns="0" tIns="0" rIns="0" bIns="0" rtlCol="0" anchor="ctr"/>
+          <a:lstStyle/>
+          <a:p>
+            <a:pPr indent="0" marL="0">
+              <a:buNone/>
+            </a:pPr>
+            <a:r>
+              <a:rPr lang="en-US" sz="1250" b="1" dirty="0">
                 <a:solidFill>
                   <a:srgbClr val="22384C"/>
                 </a:solidFill>
@@ -6940,41 +8011,38 @@
                 <a:ea typeface="Calibri" pitchFamily="34" charset="-122"/>
                 <a:cs typeface="Calibri" pitchFamily="34" charset="-120"/>
               </a:rPr>
-              <a:t>Strands Agents SDK</a:t>
-            </a:r>
-            <a:endParaRPr lang="en-US" sz="1550" dirty="0"/>
-          </a:p>
-        </p:txBody>
-      </p:sp>
-      <p:sp>
-        <p:nvSpPr>
-          <p:cNvPr id="9" name="Text 7"/>
-          <p:cNvSpPr/>
-          <p:nvPr/>
-        </p:nvSpPr>
-        <p:spPr>
-          <a:xfrm>
-            <a:off x="987552" y="2633472"/>
-            <a:ext cx="4846320" cy="475488"/>
-          </a:xfrm>
-          <a:prstGeom prst="rect">
-            <a:avLst/>
-          </a:prstGeom>
-          <a:noFill/>
-          <a:ln/>
-        </p:spPr>
-        <p:txBody>
-          <a:bodyPr wrap="square" lIns="0" tIns="0" rIns="0" bIns="0" rtlCol="0" anchor="ctr"/>
-          <a:lstStyle/>
-          <a:p>
-            <a:pPr indent="0" marL="0">
-              <a:lnSpc>
-                <a:spcPts val="1700"/>
-              </a:lnSpc>
-              <a:buNone/>
-            </a:pPr>
-            <a:r>
-              <a:rPr lang="en-US" sz="1250" dirty="0">
+              <a:t>The till</a:t>
+            </a:r>
+            <a:endParaRPr lang="en-US" sz="1250" dirty="0"/>
+          </a:p>
+        </p:txBody>
+      </p:sp>
+      <p:sp>
+        <p:nvSpPr>
+          <p:cNvPr id="10" name="Text 8"/>
+          <p:cNvSpPr/>
+          <p:nvPr/>
+        </p:nvSpPr>
+        <p:spPr>
+          <a:xfrm>
+            <a:off x="914400" y="2606040"/>
+            <a:ext cx="2468880" cy="256032"/>
+          </a:xfrm>
+          <a:prstGeom prst="rect">
+            <a:avLst/>
+          </a:prstGeom>
+          <a:noFill/>
+          <a:ln/>
+        </p:spPr>
+        <p:txBody>
+          <a:bodyPr wrap="square" lIns="0" tIns="0" rIns="0" bIns="0" rtlCol="0" anchor="ctr"/>
+          <a:lstStyle/>
+          <a:p>
+            <a:pPr indent="0" marL="0">
+              <a:buNone/>
+            </a:pPr>
+            <a:r>
+              <a:rPr lang="en-US" sz="1050" dirty="0">
                 <a:solidFill>
                   <a:srgbClr val="5A7186"/>
                 </a:solidFill>
@@ -6982,58 +8050,65 @@
                 <a:ea typeface="Calibri" pitchFamily="34" charset="-122"/>
                 <a:cs typeface="Calibri" pitchFamily="34" charset="-120"/>
               </a:rPr>
-              <a:t>One Agent, 16 tools, one hook</a:t>
-            </a:r>
-            <a:endParaRPr lang="en-US" sz="1250" dirty="0"/>
-          </a:p>
-        </p:txBody>
-      </p:sp>
-      <p:sp>
-        <p:nvSpPr>
-          <p:cNvPr id="10" name="Shape 8"/>
-          <p:cNvSpPr/>
-          <p:nvPr/>
-        </p:nvSpPr>
-        <p:spPr>
-          <a:xfrm>
-            <a:off x="566928" y="3328416"/>
-            <a:ext cx="274320" cy="274320"/>
-          </a:xfrm>
-          <a:prstGeom prst="ellipse">
-            <a:avLst/>
+              <a:t>one line per sale</a:t>
+            </a:r>
+            <a:endParaRPr lang="en-US" sz="1050" dirty="0"/>
+          </a:p>
+        </p:txBody>
+      </p:sp>
+      <p:sp>
+        <p:nvSpPr>
+          <p:cNvPr id="11" name="Shape 9"/>
+          <p:cNvSpPr/>
+          <p:nvPr/>
+        </p:nvSpPr>
+        <p:spPr>
+          <a:xfrm>
+            <a:off x="786384" y="3145536"/>
+            <a:ext cx="2743200" cy="676656"/>
+          </a:xfrm>
+          <a:prstGeom prst="roundRect">
+            <a:avLst>
+              <a:gd name="adj" fmla="val 8108"/>
+            </a:avLst>
           </a:prstGeom>
           <a:solidFill>
-            <a:srgbClr val="5B9BD1"/>
+            <a:srgbClr val="FFFFFF"/>
           </a:solidFill>
-          <a:ln/>
-        </p:spPr>
-      </p:sp>
-      <p:sp>
-        <p:nvSpPr>
-          <p:cNvPr id="11" name="Text 9"/>
-          <p:cNvSpPr/>
-          <p:nvPr/>
-        </p:nvSpPr>
-        <p:spPr>
-          <a:xfrm>
-            <a:off x="987552" y="3273552"/>
-            <a:ext cx="4846320" cy="329184"/>
-          </a:xfrm>
-          <a:prstGeom prst="rect">
-            <a:avLst/>
-          </a:prstGeom>
-          <a:noFill/>
-          <a:ln/>
-        </p:spPr>
-        <p:txBody>
-          <a:bodyPr wrap="square" lIns="0" tIns="0" rIns="0" bIns="0" rtlCol="0" anchor="ctr"/>
-          <a:lstStyle/>
-          <a:p>
-            <a:pPr indent="0" marL="0">
-              <a:buNone/>
-            </a:pPr>
-            <a:r>
-              <a:rPr lang="en-US" sz="1550" b="1" dirty="0">
+          <a:ln w="12700">
+            <a:solidFill>
+              <a:srgbClr val="DCE6EF"/>
+            </a:solidFill>
+            <a:prstDash val="solid"/>
+          </a:ln>
+        </p:spPr>
+      </p:sp>
+      <p:sp>
+        <p:nvSpPr>
+          <p:cNvPr id="12" name="Text 10"/>
+          <p:cNvSpPr/>
+          <p:nvPr/>
+        </p:nvSpPr>
+        <p:spPr>
+          <a:xfrm>
+            <a:off x="914400" y="3209544"/>
+            <a:ext cx="2468880" cy="256032"/>
+          </a:xfrm>
+          <a:prstGeom prst="rect">
+            <a:avLst/>
+          </a:prstGeom>
+          <a:noFill/>
+          <a:ln/>
+        </p:spPr>
+        <p:txBody>
+          <a:bodyPr wrap="square" lIns="0" tIns="0" rIns="0" bIns="0" rtlCol="0" anchor="ctr"/>
+          <a:lstStyle/>
+          <a:p>
+            <a:pPr indent="0" marL="0">
+              <a:buNone/>
+            </a:pPr>
+            <a:r>
+              <a:rPr lang="en-US" sz="1250" b="1" dirty="0">
                 <a:solidFill>
                   <a:srgbClr val="22384C"/>
                 </a:solidFill>
@@ -7041,41 +8116,38 @@
                 <a:ea typeface="Calibri" pitchFamily="34" charset="-122"/>
                 <a:cs typeface="Calibri" pitchFamily="34" charset="-120"/>
               </a:rPr>
-              <a:t>Amazon Bedrock</a:t>
-            </a:r>
-            <a:endParaRPr lang="en-US" sz="1550" dirty="0"/>
-          </a:p>
-        </p:txBody>
-      </p:sp>
-      <p:sp>
-        <p:nvSpPr>
-          <p:cNvPr id="12" name="Text 10"/>
-          <p:cNvSpPr/>
-          <p:nvPr/>
-        </p:nvSpPr>
-        <p:spPr>
-          <a:xfrm>
-            <a:off x="987552" y="3602736"/>
-            <a:ext cx="4846320" cy="475488"/>
-          </a:xfrm>
-          <a:prstGeom prst="rect">
-            <a:avLst/>
-          </a:prstGeom>
-          <a:noFill/>
-          <a:ln/>
-        </p:spPr>
-        <p:txBody>
-          <a:bodyPr wrap="square" lIns="0" tIns="0" rIns="0" bIns="0" rtlCol="0" anchor="ctr"/>
-          <a:lstStyle/>
-          <a:p>
-            <a:pPr indent="0" marL="0">
-              <a:lnSpc>
-                <a:spcPts val="1700"/>
-              </a:lnSpc>
-              <a:buNone/>
-            </a:pPr>
-            <a:r>
-              <a:rPr lang="en-US" sz="1250" dirty="0">
+              <a:t>The team</a:t>
+            </a:r>
+            <a:endParaRPr lang="en-US" sz="1250" dirty="0"/>
+          </a:p>
+        </p:txBody>
+      </p:sp>
+      <p:sp>
+        <p:nvSpPr>
+          <p:cNvPr id="13" name="Text 11"/>
+          <p:cNvSpPr/>
+          <p:nvPr/>
+        </p:nvSpPr>
+        <p:spPr>
+          <a:xfrm>
+            <a:off x="914400" y="3465576"/>
+            <a:ext cx="2468880" cy="256032"/>
+          </a:xfrm>
+          <a:prstGeom prst="rect">
+            <a:avLst/>
+          </a:prstGeom>
+          <a:noFill/>
+          <a:ln/>
+        </p:spPr>
+        <p:txBody>
+          <a:bodyPr wrap="square" lIns="0" tIns="0" rIns="0" bIns="0" rtlCol="0" anchor="ctr"/>
+          <a:lstStyle/>
+          <a:p>
+            <a:pPr indent="0" marL="0">
+              <a:buNone/>
+            </a:pPr>
+            <a:r>
+              <a:rPr lang="en-US" sz="1050" dirty="0">
                 <a:solidFill>
                   <a:srgbClr val="5A7186"/>
                 </a:solidFill>
@@ -7083,58 +8155,65 @@
                 <a:ea typeface="Calibri" pitchFamily="34" charset="-122"/>
                 <a:cs typeface="Calibri" pitchFamily="34" charset="-120"/>
               </a:rPr>
-              <a:t>Claude, resolved from the environment</a:t>
-            </a:r>
-            <a:endParaRPr lang="en-US" sz="1250" dirty="0"/>
-          </a:p>
-        </p:txBody>
-      </p:sp>
-      <p:sp>
-        <p:nvSpPr>
-          <p:cNvPr id="13" name="Shape 11"/>
-          <p:cNvSpPr/>
-          <p:nvPr/>
-        </p:nvSpPr>
-        <p:spPr>
-          <a:xfrm>
-            <a:off x="566928" y="4297680"/>
-            <a:ext cx="274320" cy="274320"/>
-          </a:xfrm>
-          <a:prstGeom prst="ellipse">
-            <a:avLst/>
+              <a:t>ticks its own jobs</a:t>
+            </a:r>
+            <a:endParaRPr lang="en-US" sz="1050" dirty="0"/>
+          </a:p>
+        </p:txBody>
+      </p:sp>
+      <p:sp>
+        <p:nvSpPr>
+          <p:cNvPr id="14" name="Shape 12"/>
+          <p:cNvSpPr/>
+          <p:nvPr/>
+        </p:nvSpPr>
+        <p:spPr>
+          <a:xfrm>
+            <a:off x="786384" y="4005072"/>
+            <a:ext cx="2743200" cy="676656"/>
+          </a:xfrm>
+          <a:prstGeom prst="roundRect">
+            <a:avLst>
+              <a:gd name="adj" fmla="val 8108"/>
+            </a:avLst>
           </a:prstGeom>
           <a:solidFill>
-            <a:srgbClr val="5B9BD1"/>
+            <a:srgbClr val="FFFFFF"/>
           </a:solidFill>
-          <a:ln/>
-        </p:spPr>
-      </p:sp>
-      <p:sp>
-        <p:nvSpPr>
-          <p:cNvPr id="14" name="Text 12"/>
-          <p:cNvSpPr/>
-          <p:nvPr/>
-        </p:nvSpPr>
-        <p:spPr>
-          <a:xfrm>
-            <a:off x="987552" y="4242816"/>
-            <a:ext cx="4846320" cy="329184"/>
-          </a:xfrm>
-          <a:prstGeom prst="rect">
-            <a:avLst/>
-          </a:prstGeom>
-          <a:noFill/>
-          <a:ln/>
-        </p:spPr>
-        <p:txBody>
-          <a:bodyPr wrap="square" lIns="0" tIns="0" rIns="0" bIns="0" rtlCol="0" anchor="ctr"/>
-          <a:lstStyle/>
-          <a:p>
-            <a:pPr indent="0" marL="0">
-              <a:buNone/>
-            </a:pPr>
-            <a:r>
-              <a:rPr lang="en-US" sz="1550" b="1" dirty="0">
+          <a:ln w="12700">
+            <a:solidFill>
+              <a:srgbClr val="DCE6EF"/>
+            </a:solidFill>
+            <a:prstDash val="solid"/>
+          </a:ln>
+        </p:spPr>
+      </p:sp>
+      <p:sp>
+        <p:nvSpPr>
+          <p:cNvPr id="15" name="Text 13"/>
+          <p:cNvSpPr/>
+          <p:nvPr/>
+        </p:nvSpPr>
+        <p:spPr>
+          <a:xfrm>
+            <a:off x="914400" y="4069080"/>
+            <a:ext cx="2468880" cy="256032"/>
+          </a:xfrm>
+          <a:prstGeom prst="rect">
+            <a:avLst/>
+          </a:prstGeom>
+          <a:noFill/>
+          <a:ln/>
+        </p:spPr>
+        <p:txBody>
+          <a:bodyPr wrap="square" lIns="0" tIns="0" rIns="0" bIns="0" rtlCol="0" anchor="ctr"/>
+          <a:lstStyle/>
+          <a:p>
+            <a:pPr indent="0" marL="0">
+              <a:buNone/>
+            </a:pPr>
+            <a:r>
+              <a:rPr lang="en-US" sz="1250" b="1" dirty="0">
                 <a:solidFill>
                   <a:srgbClr val="22384C"/>
                 </a:solidFill>
@@ -7142,41 +8221,38 @@
                 <a:ea typeface="Calibri" pitchFamily="34" charset="-122"/>
                 <a:cs typeface="Calibri" pitchFamily="34" charset="-120"/>
               </a:rPr>
-              <a:t>Amazon S3</a:t>
-            </a:r>
-            <a:endParaRPr lang="en-US" sz="1550" dirty="0"/>
-          </a:p>
-        </p:txBody>
-      </p:sp>
-      <p:sp>
-        <p:nvSpPr>
-          <p:cNvPr id="15" name="Text 13"/>
-          <p:cNvSpPr/>
-          <p:nvPr/>
-        </p:nvSpPr>
-        <p:spPr>
-          <a:xfrm>
-            <a:off x="987552" y="4572000"/>
-            <a:ext cx="4846320" cy="475488"/>
-          </a:xfrm>
-          <a:prstGeom prst="rect">
-            <a:avLst/>
-          </a:prstGeom>
-          <a:noFill/>
-          <a:ln/>
-        </p:spPr>
-        <p:txBody>
-          <a:bodyPr wrap="square" lIns="0" tIns="0" rIns="0" bIns="0" rtlCol="0" anchor="ctr"/>
-          <a:lstStyle/>
-          <a:p>
-            <a:pPr indent="0" marL="0">
-              <a:lnSpc>
-                <a:spcPts val="1700"/>
-              </a:lnSpc>
-              <a:buNone/>
-            </a:pPr>
-            <a:r>
-              <a:rPr lang="en-US" sz="1250" dirty="0">
+              <a:t>The owner</a:t>
+            </a:r>
+            <a:endParaRPr lang="en-US" sz="1250" dirty="0"/>
+          </a:p>
+        </p:txBody>
+      </p:sp>
+      <p:sp>
+        <p:nvSpPr>
+          <p:cNvPr id="16" name="Text 14"/>
+          <p:cNvSpPr/>
+          <p:nvPr/>
+        </p:nvSpPr>
+        <p:spPr>
+          <a:xfrm>
+            <a:off x="914400" y="4325112"/>
+            <a:ext cx="2468880" cy="256032"/>
+          </a:xfrm>
+          <a:prstGeom prst="rect">
+            <a:avLst/>
+          </a:prstGeom>
+          <a:noFill/>
+          <a:ln/>
+        </p:spPr>
+        <p:txBody>
+          <a:bodyPr wrap="square" lIns="0" tIns="0" rIns="0" bIns="0" rtlCol="0" anchor="ctr"/>
+          <a:lstStyle/>
+          <a:p>
+            <a:pPr indent="0" marL="0">
+              <a:buNone/>
+            </a:pPr>
+            <a:r>
+              <a:rPr lang="en-US" sz="1050" dirty="0">
                 <a:solidFill>
                   <a:srgbClr val="5A7186"/>
                 </a:solidFill>
@@ -7184,38 +8260,65 @@
                 <a:ea typeface="Calibri" pitchFamily="34" charset="-122"/>
                 <a:cs typeface="Calibri" pitchFamily="34" charset="-120"/>
               </a:rPr>
-              <a:t>The till export, read by offset</a:t>
-            </a:r>
-            <a:endParaRPr lang="en-US" sz="1250" dirty="0"/>
-          </a:p>
-        </p:txBody>
-      </p:sp>
-      <p:sp>
-        <p:nvSpPr>
-          <p:cNvPr id="16" name="Text 14"/>
-          <p:cNvSpPr/>
-          <p:nvPr/>
-        </p:nvSpPr>
-        <p:spPr>
-          <a:xfrm>
-            <a:off x="6309360" y="1883664"/>
-            <a:ext cx="5303520" cy="274320"/>
-          </a:xfrm>
-          <a:prstGeom prst="rect">
-            <a:avLst/>
-          </a:prstGeom>
-          <a:noFill/>
-          <a:ln/>
-        </p:spPr>
-        <p:txBody>
-          <a:bodyPr wrap="square" lIns="0" tIns="0" rIns="0" bIns="0" rtlCol="0" anchor="ctr"/>
-          <a:lstStyle/>
-          <a:p>
-            <a:pPr indent="0" marL="0">
-              <a:buNone/>
-            </a:pPr>
-            <a:r>
-              <a:rPr lang="en-US" sz="1200" b="1" spc="200" kern="0" dirty="0">
+              <a:t>briefs it, then asks</a:t>
+            </a:r>
+            <a:endParaRPr lang="en-US" sz="1050" dirty="0"/>
+          </a:p>
+        </p:txBody>
+      </p:sp>
+      <p:sp>
+        <p:nvSpPr>
+          <p:cNvPr id="17" name="Shape 15"/>
+          <p:cNvSpPr/>
+          <p:nvPr/>
+        </p:nvSpPr>
+        <p:spPr>
+          <a:xfrm>
+            <a:off x="4133088" y="1792224"/>
+            <a:ext cx="3931920" cy="3200400"/>
+          </a:xfrm>
+          <a:prstGeom prst="roundRect">
+            <a:avLst>
+              <a:gd name="adj" fmla="val 2286"/>
+            </a:avLst>
+          </a:prstGeom>
+          <a:solidFill>
+            <a:srgbClr val="FBF3E4"/>
+          </a:solidFill>
+          <a:ln w="12700">
+            <a:solidFill>
+              <a:srgbClr val="DCE6EF"/>
+            </a:solidFill>
+            <a:prstDash val="solid"/>
+          </a:ln>
+        </p:spPr>
+      </p:sp>
+      <p:sp>
+        <p:nvSpPr>
+          <p:cNvPr id="18" name="Text 16"/>
+          <p:cNvSpPr/>
+          <p:nvPr/>
+        </p:nvSpPr>
+        <p:spPr>
+          <a:xfrm>
+            <a:off x="4334256" y="1901952"/>
+            <a:ext cx="3529584" cy="274320"/>
+          </a:xfrm>
+          <a:prstGeom prst="rect">
+            <a:avLst/>
+          </a:prstGeom>
+          <a:noFill/>
+          <a:ln/>
+        </p:spPr>
+        <p:txBody>
+          <a:bodyPr wrap="square" lIns="0" tIns="0" rIns="0" bIns="0" rtlCol="0" anchor="ctr"/>
+          <a:lstStyle/>
+          <a:p>
+            <a:pPr indent="0" marL="0">
+              <a:buNone/>
+            </a:pPr>
+            <a:r>
+              <a:rPr lang="en-US" sz="1100" b="1" spc="160" kern="0" dirty="0">
                 <a:solidFill>
                   <a:srgbClr val="3276B1"/>
                 </a:solidFill>
@@ -7223,100 +8326,155 @@
                 <a:ea typeface="Calibri" pitchFamily="34" charset="-122"/>
                 <a:cs typeface="Calibri" pitchFamily="34" charset="-120"/>
               </a:rPr>
-              <a:t>DEPLOYED</a:t>
-            </a:r>
-            <a:endParaRPr lang="en-US" sz="1200" dirty="0"/>
-          </a:p>
-        </p:txBody>
-      </p:sp>
-      <p:sp>
-        <p:nvSpPr>
-          <p:cNvPr id="17" name="Shape 15"/>
-          <p:cNvSpPr/>
-          <p:nvPr/>
-        </p:nvSpPr>
-        <p:spPr>
-          <a:xfrm>
-            <a:off x="6309360" y="2359152"/>
-            <a:ext cx="274320" cy="274320"/>
-          </a:xfrm>
-          <a:prstGeom prst="ellipse">
-            <a:avLst/>
-          </a:prstGeom>
-          <a:solidFill>
-            <a:srgbClr val="5B9BD1"/>
-          </a:solidFill>
-          <a:ln/>
-        </p:spPr>
-      </p:sp>
-      <p:sp>
-        <p:nvSpPr>
-          <p:cNvPr id="18" name="Text 16"/>
-          <p:cNvSpPr/>
-          <p:nvPr/>
-        </p:nvSpPr>
-        <p:spPr>
-          <a:xfrm>
-            <a:off x="6729984" y="2304288"/>
-            <a:ext cx="4846320" cy="329184"/>
-          </a:xfrm>
-          <a:prstGeom prst="rect">
-            <a:avLst/>
-          </a:prstGeom>
-          <a:noFill/>
-          <a:ln/>
-        </p:spPr>
-        <p:txBody>
-          <a:bodyPr wrap="square" lIns="0" tIns="0" rIns="0" bIns="0" rtlCol="0" anchor="ctr"/>
-          <a:lstStyle/>
-          <a:p>
-            <a:pPr indent="0" marL="0">
-              <a:buNone/>
-            </a:pPr>
-            <a:r>
-              <a:rPr lang="en-US" sz="1550" b="1" dirty="0">
+              <a:t>WHAT PERSISTS</a:t>
+            </a:r>
+            <a:endParaRPr lang="en-US" sz="1100" dirty="0"/>
+          </a:p>
+        </p:txBody>
+      </p:sp>
+      <p:sp>
+        <p:nvSpPr>
+          <p:cNvPr id="19" name="Text 17"/>
+          <p:cNvSpPr/>
+          <p:nvPr/>
+        </p:nvSpPr>
+        <p:spPr>
+          <a:xfrm>
+            <a:off x="4352544" y="2267712"/>
+            <a:ext cx="3566160" cy="237744"/>
+          </a:xfrm>
+          <a:prstGeom prst="rect">
+            <a:avLst/>
+          </a:prstGeom>
+          <a:noFill/>
+          <a:ln/>
+        </p:spPr>
+        <p:txBody>
+          <a:bodyPr wrap="square" lIns="0" tIns="0" rIns="0" bIns="0" rtlCol="0" anchor="ctr"/>
+          <a:lstStyle/>
+          <a:p>
+            <a:pPr indent="0" marL="0">
+              <a:buNone/>
+            </a:pPr>
+            <a:r>
+              <a:rPr lang="en-US" sz="1150" b="1" dirty="0">
                 <a:solidFill>
                   <a:srgbClr val="22384C"/>
+                </a:solidFill>
+                <a:latin typeface="Consolas" pitchFamily="34" charset="0"/>
+                <a:ea typeface="Consolas" pitchFamily="34" charset="-122"/>
+                <a:cs typeface="Consolas" pitchFamily="34" charset="-120"/>
+              </a:rPr>
+              <a:t>bills.jsonl</a:t>
+            </a:r>
+            <a:endParaRPr lang="en-US" sz="1150" dirty="0"/>
+          </a:p>
+        </p:txBody>
+      </p:sp>
+      <p:sp>
+        <p:nvSpPr>
+          <p:cNvPr id="20" name="Text 18"/>
+          <p:cNvSpPr/>
+          <p:nvPr/>
+        </p:nvSpPr>
+        <p:spPr>
+          <a:xfrm>
+            <a:off x="4352544" y="2514600"/>
+            <a:ext cx="3566160" cy="237744"/>
+          </a:xfrm>
+          <a:prstGeom prst="rect">
+            <a:avLst/>
+          </a:prstGeom>
+          <a:noFill/>
+          <a:ln/>
+        </p:spPr>
+        <p:txBody>
+          <a:bodyPr wrap="square" lIns="0" tIns="0" rIns="0" bIns="0" rtlCol="0" anchor="ctr"/>
+          <a:lstStyle/>
+          <a:p>
+            <a:pPr indent="0" marL="0">
+              <a:buNone/>
+            </a:pPr>
+            <a:r>
+              <a:rPr lang="en-US" sz="1050" dirty="0">
+                <a:solidFill>
+                  <a:srgbClr val="5A7186"/>
                 </a:solidFill>
                 <a:latin typeface="Calibri" pitchFamily="34" charset="0"/>
                 <a:ea typeface="Calibri" pitchFamily="34" charset="-122"/>
                 <a:cs typeface="Calibri" pitchFamily="34" charset="-120"/>
               </a:rPr>
-              <a:t>EventBridge Scheduler</a:t>
-            </a:r>
-            <a:endParaRPr lang="en-US" sz="1550" dirty="0"/>
-          </a:p>
-        </p:txBody>
-      </p:sp>
-      <p:sp>
-        <p:nvSpPr>
-          <p:cNvPr id="19" name="Text 17"/>
-          <p:cNvSpPr/>
-          <p:nvPr/>
-        </p:nvSpPr>
-        <p:spPr>
-          <a:xfrm>
-            <a:off x="6729984" y="2633472"/>
-            <a:ext cx="4846320" cy="475488"/>
-          </a:xfrm>
-          <a:prstGeom prst="rect">
-            <a:avLst/>
-          </a:prstGeom>
-          <a:noFill/>
-          <a:ln/>
-        </p:spPr>
-        <p:txBody>
-          <a:bodyPr wrap="square" lIns="0" tIns="0" rIns="0" bIns="0" rtlCol="0" anchor="ctr"/>
-          <a:lstStyle/>
-          <a:p>
-            <a:pPr indent="0" marL="0">
-              <a:lnSpc>
-                <a:spcPts val="1700"/>
-              </a:lnSpc>
-              <a:buNone/>
-            </a:pPr>
-            <a:r>
-              <a:rPr lang="en-US" sz="1250" dirty="0">
+              <a:t>S3, append only, never rewritten</a:t>
+            </a:r>
+            <a:endParaRPr lang="en-US" sz="1050" dirty="0"/>
+          </a:p>
+        </p:txBody>
+      </p:sp>
+      <p:sp>
+        <p:nvSpPr>
+          <p:cNvPr id="21" name="Text 19"/>
+          <p:cNvSpPr/>
+          <p:nvPr/>
+        </p:nvSpPr>
+        <p:spPr>
+          <a:xfrm>
+            <a:off x="4352544" y="2907792"/>
+            <a:ext cx="3566160" cy="237744"/>
+          </a:xfrm>
+          <a:prstGeom prst="rect">
+            <a:avLst/>
+          </a:prstGeom>
+          <a:noFill/>
+          <a:ln/>
+        </p:spPr>
+        <p:txBody>
+          <a:bodyPr wrap="square" lIns="0" tIns="0" rIns="0" bIns="0" rtlCol="0" anchor="ctr"/>
+          <a:lstStyle/>
+          <a:p>
+            <a:pPr indent="0" marL="0">
+              <a:buNone/>
+            </a:pPr>
+            <a:r>
+              <a:rPr lang="en-US" sz="1150" b="1" dirty="0">
+                <a:solidFill>
+                  <a:srgbClr val="22384C"/>
+                </a:solidFill>
+                <a:latin typeface="Consolas" pitchFamily="34" charset="0"/>
+                <a:ea typeface="Consolas" pitchFamily="34" charset="-122"/>
+                <a:cs typeface="Consolas" pitchFamily="34" charset="-120"/>
+              </a:rPr>
+              <a:t>corrected history</a:t>
+            </a:r>
+            <a:endParaRPr lang="en-US" sz="1150" dirty="0"/>
+          </a:p>
+        </p:txBody>
+      </p:sp>
+      <p:sp>
+        <p:nvSpPr>
+          <p:cNvPr id="22" name="Text 20"/>
+          <p:cNvSpPr/>
+          <p:nvPr/>
+        </p:nvSpPr>
+        <p:spPr>
+          <a:xfrm>
+            <a:off x="4352544" y="3154680"/>
+            <a:ext cx="3566160" cy="237744"/>
+          </a:xfrm>
+          <a:prstGeom prst="rect">
+            <a:avLst/>
+          </a:prstGeom>
+          <a:noFill/>
+          <a:ln/>
+        </p:spPr>
+        <p:txBody>
+          <a:bodyPr wrap="square" lIns="0" tIns="0" rIns="0" bIns="0" rtlCol="0" anchor="ctr"/>
+          <a:lstStyle/>
+          <a:p>
+            <a:pPr indent="0" marL="0">
+              <a:buNone/>
+            </a:pPr>
+            <a:r>
+              <a:rPr lang="en-US" sz="1050" dirty="0">
                 <a:solidFill>
                   <a:srgbClr val="5A7186"/>
                 </a:solidFill>
@@ -7324,100 +8482,155 @@
                 <a:ea typeface="Calibri" pitchFamily="34" charset="-122"/>
                 <a:cs typeface="Calibri" pitchFamily="34" charset="-120"/>
               </a:rPr>
-              <a:t>One schedule per shop</a:t>
-            </a:r>
-            <a:endParaRPr lang="en-US" sz="1250" dirty="0"/>
-          </a:p>
-        </p:txBody>
-      </p:sp>
-      <p:sp>
-        <p:nvSpPr>
-          <p:cNvPr id="20" name="Shape 18"/>
-          <p:cNvSpPr/>
-          <p:nvPr/>
-        </p:nvSpPr>
-        <p:spPr>
-          <a:xfrm>
-            <a:off x="6309360" y="3328416"/>
-            <a:ext cx="274320" cy="274320"/>
-          </a:xfrm>
-          <a:prstGeom prst="ellipse">
-            <a:avLst/>
-          </a:prstGeom>
-          <a:solidFill>
-            <a:srgbClr val="5B9BD1"/>
-          </a:solidFill>
-          <a:ln/>
-        </p:spPr>
-      </p:sp>
-      <p:sp>
-        <p:nvSpPr>
-          <p:cNvPr id="21" name="Text 19"/>
-          <p:cNvSpPr/>
-          <p:nvPr/>
-        </p:nvSpPr>
-        <p:spPr>
-          <a:xfrm>
-            <a:off x="6729984" y="3273552"/>
-            <a:ext cx="4846320" cy="329184"/>
-          </a:xfrm>
-          <a:prstGeom prst="rect">
-            <a:avLst/>
-          </a:prstGeom>
-          <a:noFill/>
-          <a:ln/>
-        </p:spPr>
-        <p:txBody>
-          <a:bodyPr wrap="square" lIns="0" tIns="0" rIns="0" bIns="0" rtlCol="0" anchor="ctr"/>
-          <a:lstStyle/>
-          <a:p>
-            <a:pPr indent="0" marL="0">
-              <a:buNone/>
-            </a:pPr>
-            <a:r>
-              <a:rPr lang="en-US" sz="1550" b="1" dirty="0">
+              <a:t>cached on the file's mtime</a:t>
+            </a:r>
+            <a:endParaRPr lang="en-US" sz="1050" dirty="0"/>
+          </a:p>
+        </p:txBody>
+      </p:sp>
+      <p:sp>
+        <p:nvSpPr>
+          <p:cNvPr id="23" name="Text 21"/>
+          <p:cNvSpPr/>
+          <p:nvPr/>
+        </p:nvSpPr>
+        <p:spPr>
+          <a:xfrm>
+            <a:off x="4352544" y="3547872"/>
+            <a:ext cx="3566160" cy="237744"/>
+          </a:xfrm>
+          <a:prstGeom prst="rect">
+            <a:avLst/>
+          </a:prstGeom>
+          <a:noFill/>
+          <a:ln/>
+        </p:spPr>
+        <p:txBody>
+          <a:bodyPr wrap="square" lIns="0" tIns="0" rIns="0" bIns="0" rtlCol="0" anchor="ctr"/>
+          <a:lstStyle/>
+          <a:p>
+            <a:pPr indent="0" marL="0">
+              <a:buNone/>
+            </a:pPr>
+            <a:r>
+              <a:rPr lang="en-US" sz="1150" b="1" dirty="0">
                 <a:solidFill>
                   <a:srgbClr val="22384C"/>
+                </a:solidFill>
+                <a:latin typeface="Consolas" pitchFamily="34" charset="0"/>
+                <a:ea typeface="Consolas" pitchFamily="34" charset="-122"/>
+                <a:cs typeface="Consolas" pitchFamily="34" charset="-120"/>
+              </a:rPr>
+              <a:t>notes.md</a:t>
+            </a:r>
+            <a:endParaRPr lang="en-US" sz="1150" dirty="0"/>
+          </a:p>
+        </p:txBody>
+      </p:sp>
+      <p:sp>
+        <p:nvSpPr>
+          <p:cNvPr id="24" name="Text 22"/>
+          <p:cNvSpPr/>
+          <p:nvPr/>
+        </p:nvSpPr>
+        <p:spPr>
+          <a:xfrm>
+            <a:off x="4352544" y="3794760"/>
+            <a:ext cx="3566160" cy="237744"/>
+          </a:xfrm>
+          <a:prstGeom prst="rect">
+            <a:avLst/>
+          </a:prstGeom>
+          <a:noFill/>
+          <a:ln/>
+        </p:spPr>
+        <p:txBody>
+          <a:bodyPr wrap="square" lIns="0" tIns="0" rIns="0" bIns="0" rtlCol="0" anchor="ctr"/>
+          <a:lstStyle/>
+          <a:p>
+            <a:pPr indent="0" marL="0">
+              <a:buNone/>
+            </a:pPr>
+            <a:r>
+              <a:rPr lang="en-US" sz="1050" dirty="0">
+                <a:solidFill>
+                  <a:srgbClr val="5A7186"/>
                 </a:solidFill>
                 <a:latin typeface="Calibri" pitchFamily="34" charset="0"/>
                 <a:ea typeface="Calibri" pitchFamily="34" charset="-122"/>
                 <a:cs typeface="Calibri" pitchFamily="34" charset="-120"/>
               </a:rPr>
-              <a:t>AgentCore Runtime</a:t>
-            </a:r>
-            <a:endParaRPr lang="en-US" sz="1550" dirty="0"/>
-          </a:p>
-        </p:txBody>
-      </p:sp>
-      <p:sp>
-        <p:nvSpPr>
-          <p:cNvPr id="22" name="Text 20"/>
-          <p:cNvSpPr/>
-          <p:nvPr/>
-        </p:nvSpPr>
-        <p:spPr>
-          <a:xfrm>
-            <a:off x="6729984" y="3602736"/>
-            <a:ext cx="4846320" cy="475488"/>
-          </a:xfrm>
-          <a:prstGeom prst="rect">
-            <a:avLst/>
-          </a:prstGeom>
-          <a:noFill/>
-          <a:ln/>
-        </p:spPr>
-        <p:txBody>
-          <a:bodyPr wrap="square" lIns="0" tIns="0" rIns="0" bIns="0" rtlCol="0" anchor="ctr"/>
-          <a:lstStyle/>
-          <a:p>
-            <a:pPr indent="0" marL="0">
-              <a:lnSpc>
-                <a:spcPts val="1700"/>
-              </a:lnSpc>
-              <a:buNone/>
-            </a:pPr>
-            <a:r>
-              <a:rPr lang="en-US" sz="1250" dirty="0">
+              <a:t>what it learned, owner-editable</a:t>
+            </a:r>
+            <a:endParaRPr lang="en-US" sz="1050" dirty="0"/>
+          </a:p>
+        </p:txBody>
+      </p:sp>
+      <p:sp>
+        <p:nvSpPr>
+          <p:cNvPr id="25" name="Text 23"/>
+          <p:cNvSpPr/>
+          <p:nvPr/>
+        </p:nvSpPr>
+        <p:spPr>
+          <a:xfrm>
+            <a:off x="4352544" y="4187952"/>
+            <a:ext cx="3566160" cy="237744"/>
+          </a:xfrm>
+          <a:prstGeom prst="rect">
+            <a:avLst/>
+          </a:prstGeom>
+          <a:noFill/>
+          <a:ln/>
+        </p:spPr>
+        <p:txBody>
+          <a:bodyPr wrap="square" lIns="0" tIns="0" rIns="0" bIns="0" rtlCol="0" anchor="ctr"/>
+          <a:lstStyle/>
+          <a:p>
+            <a:pPr indent="0" marL="0">
+              <a:buNone/>
+            </a:pPr>
+            <a:r>
+              <a:rPr lang="en-US" sz="1150" b="1" dirty="0">
+                <a:solidFill>
+                  <a:srgbClr val="22384C"/>
+                </a:solidFill>
+                <a:latin typeface="Consolas" pitchFamily="34" charset="0"/>
+                <a:ea typeface="Consolas" pitchFamily="34" charset="-122"/>
+                <a:cs typeface="Consolas" pitchFamily="34" charset="-120"/>
+              </a:rPr>
+              <a:t>journal, tickets</a:t>
+            </a:r>
+            <a:endParaRPr lang="en-US" sz="1150" dirty="0"/>
+          </a:p>
+        </p:txBody>
+      </p:sp>
+      <p:sp>
+        <p:nvSpPr>
+          <p:cNvPr id="26" name="Text 24"/>
+          <p:cNvSpPr/>
+          <p:nvPr/>
+        </p:nvSpPr>
+        <p:spPr>
+          <a:xfrm>
+            <a:off x="4352544" y="4434840"/>
+            <a:ext cx="3566160" cy="237744"/>
+          </a:xfrm>
+          <a:prstGeom prst="rect">
+            <a:avLst/>
+          </a:prstGeom>
+          <a:noFill/>
+          <a:ln/>
+        </p:spPr>
+        <p:txBody>
+          <a:bodyPr wrap="square" lIns="0" tIns="0" rIns="0" bIns="0" rtlCol="0" anchor="ctr"/>
+          <a:lstStyle/>
+          <a:p>
+            <a:pPr indent="0" marL="0">
+              <a:buNone/>
+            </a:pPr>
+            <a:r>
+              <a:rPr lang="en-US" sz="1050" dirty="0">
                 <a:solidFill>
                   <a:srgbClr val="5A7186"/>
                 </a:solidFill>
@@ -7425,127 +8638,618 @@
                 <a:ea typeface="Calibri" pitchFamily="34" charset="-122"/>
                 <a:cs typeface="Calibri" pitchFamily="34" charset="-120"/>
               </a:rPr>
-              <a:t>One session per bakery</a:t>
-            </a:r>
-            <a:endParaRPr lang="en-US" sz="1250" dirty="0"/>
-          </a:p>
-        </p:txBody>
-      </p:sp>
-      <p:sp>
-        <p:nvSpPr>
-          <p:cNvPr id="23" name="Shape 21"/>
-          <p:cNvSpPr/>
-          <p:nvPr/>
-        </p:nvSpPr>
-        <p:spPr>
-          <a:xfrm>
-            <a:off x="6309360" y="4297680"/>
-            <a:ext cx="274320" cy="274320"/>
-          </a:xfrm>
-          <a:prstGeom prst="ellipse">
-            <a:avLst/>
+              <a:t>what it did, what got ticked</a:t>
+            </a:r>
+            <a:endParaRPr lang="en-US" sz="1050" dirty="0"/>
+          </a:p>
+        </p:txBody>
+      </p:sp>
+      <p:sp>
+        <p:nvSpPr>
+          <p:cNvPr id="27" name="Shape 25"/>
+          <p:cNvSpPr/>
+          <p:nvPr/>
+        </p:nvSpPr>
+        <p:spPr>
+          <a:xfrm>
+            <a:off x="8430768" y="1792224"/>
+            <a:ext cx="3200400" cy="3200400"/>
+          </a:xfrm>
+          <a:prstGeom prst="roundRect">
+            <a:avLst>
+              <a:gd name="adj" fmla="val 2286"/>
+            </a:avLst>
           </a:prstGeom>
           <a:solidFill>
-            <a:srgbClr val="5B9BD1"/>
+            <a:srgbClr val="E7EFF7"/>
           </a:solidFill>
-          <a:ln/>
-        </p:spPr>
-      </p:sp>
-      <p:sp>
-        <p:nvSpPr>
-          <p:cNvPr id="24" name="Text 22"/>
-          <p:cNvSpPr/>
-          <p:nvPr/>
-        </p:nvSpPr>
-        <p:spPr>
-          <a:xfrm>
-            <a:off x="6729984" y="4242816"/>
-            <a:ext cx="4846320" cy="329184"/>
-          </a:xfrm>
-          <a:prstGeom prst="rect">
-            <a:avLst/>
-          </a:prstGeom>
-          <a:noFill/>
-          <a:ln/>
-        </p:spPr>
-        <p:txBody>
-          <a:bodyPr wrap="square" lIns="0" tIns="0" rIns="0" bIns="0" rtlCol="0" anchor="ctr"/>
-          <a:lstStyle/>
-          <a:p>
-            <a:pPr indent="0" marL="0">
-              <a:buNone/>
-            </a:pPr>
-            <a:r>
-              <a:rPr lang="en-US" sz="1550" b="1" dirty="0">
-                <a:solidFill>
-                  <a:srgbClr val="22384C"/>
+          <a:ln w="12700">
+            <a:solidFill>
+              <a:srgbClr val="DCE6EF"/>
+            </a:solidFill>
+            <a:prstDash val="solid"/>
+          </a:ln>
+        </p:spPr>
+      </p:sp>
+      <p:sp>
+        <p:nvSpPr>
+          <p:cNvPr id="28" name="Text 26"/>
+          <p:cNvSpPr/>
+          <p:nvPr/>
+        </p:nvSpPr>
+        <p:spPr>
+          <a:xfrm>
+            <a:off x="8631936" y="1901952"/>
+            <a:ext cx="2798064" cy="274320"/>
+          </a:xfrm>
+          <a:prstGeom prst="rect">
+            <a:avLst/>
+          </a:prstGeom>
+          <a:noFill/>
+          <a:ln/>
+        </p:spPr>
+        <p:txBody>
+          <a:bodyPr wrap="square" lIns="0" tIns="0" rIns="0" bIns="0" rtlCol="0" anchor="ctr"/>
+          <a:lstStyle/>
+          <a:p>
+            <a:pPr indent="0" marL="0">
+              <a:buNone/>
+            </a:pPr>
+            <a:r>
+              <a:rPr lang="en-US" sz="1100" b="1" spc="160" kern="0" dirty="0">
+                <a:solidFill>
+                  <a:srgbClr val="3276B1"/>
                 </a:solidFill>
                 <a:latin typeface="Calibri" pitchFamily="34" charset="0"/>
                 <a:ea typeface="Calibri" pitchFamily="34" charset="-122"/>
                 <a:cs typeface="Calibri" pitchFamily="34" charset="-120"/>
               </a:rPr>
-              <a:t>Amazon SES</a:t>
-            </a:r>
-            <a:endParaRPr lang="en-US" sz="1550" dirty="0"/>
-          </a:p>
-        </p:txBody>
-      </p:sp>
-      <p:sp>
-        <p:nvSpPr>
-          <p:cNvPr id="25" name="Text 23"/>
-          <p:cNvSpPr/>
-          <p:nvPr/>
-        </p:nvSpPr>
-        <p:spPr>
-          <a:xfrm>
-            <a:off x="6729984" y="4572000"/>
-            <a:ext cx="4846320" cy="475488"/>
-          </a:xfrm>
-          <a:prstGeom prst="rect">
-            <a:avLst/>
-          </a:prstGeom>
-          <a:noFill/>
-          <a:ln/>
-        </p:spPr>
-        <p:txBody>
-          <a:bodyPr wrap="square" lIns="0" tIns="0" rIns="0" bIns="0" rtlCol="0" anchor="ctr"/>
-          <a:lstStyle/>
-          <a:p>
-            <a:pPr indent="0" marL="0">
-              <a:lnSpc>
-                <a:spcPts val="1700"/>
-              </a:lnSpc>
-              <a:buNone/>
-            </a:pPr>
-            <a:r>
-              <a:rPr lang="en-US" sz="1250" dirty="0">
-                <a:solidFill>
-                  <a:srgbClr val="5A7186"/>
+              <a:t>THE AGENT   ·   STRANDS</a:t>
+            </a:r>
+            <a:endParaRPr lang="en-US" sz="1100" dirty="0"/>
+          </a:p>
+        </p:txBody>
+      </p:sp>
+      <p:sp>
+        <p:nvSpPr>
+          <p:cNvPr id="29" name="Text 27"/>
+          <p:cNvSpPr/>
+          <p:nvPr/>
+        </p:nvSpPr>
+        <p:spPr>
+          <a:xfrm>
+            <a:off x="8650224" y="2267712"/>
+            <a:ext cx="2834640" cy="237744"/>
+          </a:xfrm>
+          <a:prstGeom prst="rect">
+            <a:avLst/>
+          </a:prstGeom>
+          <a:noFill/>
+          <a:ln/>
+        </p:spPr>
+        <p:txBody>
+          <a:bodyPr wrap="square" lIns="0" tIns="0" rIns="0" bIns="0" rtlCol="0" anchor="ctr"/>
+          <a:lstStyle/>
+          <a:p>
+            <a:pPr indent="0" marL="0">
+              <a:buNone/>
+            </a:pPr>
+            <a:r>
+              <a:rPr lang="en-US" sz="1200" b="1" dirty="0">
+                <a:solidFill>
+                  <a:srgbClr val="22384C"/>
                 </a:solidFill>
                 <a:latin typeface="Calibri" pitchFamily="34" charset="0"/>
                 <a:ea typeface="Calibri" pitchFamily="34" charset="-122"/>
                 <a:cs typeface="Calibri" pitchFamily="34" charset="-120"/>
               </a:rPr>
-              <a:t>The one email</a:t>
-            </a:r>
-            <a:endParaRPr lang="en-US" sz="1250" dirty="0"/>
-          </a:p>
-        </p:txBody>
-      </p:sp>
-      <p:sp>
-        <p:nvSpPr>
-          <p:cNvPr id="26" name="Shape 24"/>
-          <p:cNvSpPr/>
-          <p:nvPr/>
-        </p:nvSpPr>
-        <p:spPr>
-          <a:xfrm>
-            <a:off x="566928" y="5285232"/>
-            <a:ext cx="11064240" cy="1115568"/>
+              <a:t>18 tools</a:t>
+            </a:r>
+            <a:endParaRPr lang="en-US" sz="1200" dirty="0"/>
+          </a:p>
+        </p:txBody>
+      </p:sp>
+      <p:sp>
+        <p:nvSpPr>
+          <p:cNvPr id="30" name="Text 28"/>
+          <p:cNvSpPr/>
+          <p:nvPr/>
+        </p:nvSpPr>
+        <p:spPr>
+          <a:xfrm>
+            <a:off x="8650224" y="2496312"/>
+            <a:ext cx="2834640" cy="237744"/>
+          </a:xfrm>
+          <a:prstGeom prst="rect">
+            <a:avLst/>
+          </a:prstGeom>
+          <a:noFill/>
+          <a:ln/>
+        </p:spPr>
+        <p:txBody>
+          <a:bodyPr wrap="square" lIns="0" tIns="0" rIns="0" bIns="0" rtlCol="0" anchor="ctr"/>
+          <a:lstStyle/>
+          <a:p>
+            <a:pPr indent="0" marL="0">
+              <a:buNone/>
+            </a:pPr>
+            <a:r>
+              <a:rPr lang="en-US" sz="1050" dirty="0">
+                <a:solidFill>
+                  <a:srgbClr val="5A7186"/>
+                </a:solidFill>
+                <a:latin typeface="Calibri" pitchFamily="34" charset="0"/>
+                <a:ea typeface="Calibri" pitchFamily="34" charset="-122"/>
+                <a:cs typeface="Calibri" pitchFamily="34" charset="-120"/>
+              </a:rPr>
+              <a:t>5 read  ·  5 compute  ·  3 look ahead</a:t>
+            </a:r>
+            <a:endParaRPr lang="en-US" sz="1050" dirty="0"/>
+          </a:p>
+        </p:txBody>
+      </p:sp>
+      <p:sp>
+        <p:nvSpPr>
+          <p:cNvPr id="31" name="Text 29"/>
+          <p:cNvSpPr/>
+          <p:nvPr/>
+        </p:nvSpPr>
+        <p:spPr>
+          <a:xfrm>
+            <a:off x="8650224" y="2724912"/>
+            <a:ext cx="2834640" cy="237744"/>
+          </a:xfrm>
+          <a:prstGeom prst="rect">
+            <a:avLst/>
+          </a:prstGeom>
+          <a:noFill/>
+          <a:ln/>
+        </p:spPr>
+        <p:txBody>
+          <a:bodyPr wrap="square" lIns="0" tIns="0" rIns="0" bIns="0" rtlCol="0" anchor="ctr"/>
+          <a:lstStyle/>
+          <a:p>
+            <a:pPr indent="0" marL="0">
+              <a:buNone/>
+            </a:pPr>
+            <a:r>
+              <a:rPr lang="en-US" sz="1050" dirty="0">
+                <a:solidFill>
+                  <a:srgbClr val="5A7186"/>
+                </a:solidFill>
+                <a:latin typeface="Calibri" pitchFamily="34" charset="0"/>
+                <a:ea typeface="Calibri" pitchFamily="34" charset="-122"/>
+                <a:cs typeface="Calibri" pitchFamily="34" charset="-120"/>
+              </a:rPr>
+              <a:t>2 memory  ·  1 acts</a:t>
+            </a:r>
+            <a:endParaRPr lang="en-US" sz="1050" dirty="0"/>
+          </a:p>
+        </p:txBody>
+      </p:sp>
+      <p:sp>
+        <p:nvSpPr>
+          <p:cNvPr id="32" name="Text 30"/>
+          <p:cNvSpPr/>
+          <p:nvPr/>
+        </p:nvSpPr>
+        <p:spPr>
+          <a:xfrm>
+            <a:off x="8650224" y="3182112"/>
+            <a:ext cx="2834640" cy="237744"/>
+          </a:xfrm>
+          <a:prstGeom prst="rect">
+            <a:avLst/>
+          </a:prstGeom>
+          <a:noFill/>
+          <a:ln/>
+        </p:spPr>
+        <p:txBody>
+          <a:bodyPr wrap="square" lIns="0" tIns="0" rIns="0" bIns="0" rtlCol="0" anchor="ctr"/>
+          <a:lstStyle/>
+          <a:p>
+            <a:pPr indent="0" marL="0">
+              <a:buNone/>
+            </a:pPr>
+            <a:r>
+              <a:rPr lang="en-US" sz="1200" b="1" dirty="0">
+                <a:solidFill>
+                  <a:srgbClr val="22384C"/>
+                </a:solidFill>
+                <a:latin typeface="Calibri" pitchFamily="34" charset="0"/>
+                <a:ea typeface="Calibri" pitchFamily="34" charset="-122"/>
+                <a:cs typeface="Calibri" pitchFamily="34" charset="-120"/>
+              </a:rPr>
+              <a:t>HookProvider</a:t>
+            </a:r>
+            <a:endParaRPr lang="en-US" sz="1200" dirty="0"/>
+          </a:p>
+        </p:txBody>
+      </p:sp>
+      <p:sp>
+        <p:nvSpPr>
+          <p:cNvPr id="33" name="Text 31"/>
+          <p:cNvSpPr/>
+          <p:nvPr/>
+        </p:nvSpPr>
+        <p:spPr>
+          <a:xfrm>
+            <a:off x="8650224" y="3410712"/>
+            <a:ext cx="2834640" cy="237744"/>
+          </a:xfrm>
+          <a:prstGeom prst="rect">
+            <a:avLst/>
+          </a:prstGeom>
+          <a:noFill/>
+          <a:ln/>
+        </p:spPr>
+        <p:txBody>
+          <a:bodyPr wrap="square" lIns="0" tIns="0" rIns="0" bIns="0" rtlCol="0" anchor="ctr"/>
+          <a:lstStyle/>
+          <a:p>
+            <a:pPr indent="0" marL="0">
+              <a:buNone/>
+            </a:pPr>
+            <a:r>
+              <a:rPr lang="en-US" sz="1050" dirty="0">
+                <a:solidFill>
+                  <a:srgbClr val="5A7186"/>
+                </a:solidFill>
+                <a:latin typeface="Calibri" pitchFamily="34" charset="0"/>
+                <a:ea typeface="Calibri" pitchFamily="34" charset="-122"/>
+                <a:cs typeface="Calibri" pitchFamily="34" charset="-120"/>
+              </a:rPr>
+              <a:t>cancels the run on spend,</a:t>
+            </a:r>
+            <a:endParaRPr lang="en-US" sz="1050" dirty="0"/>
+          </a:p>
+        </p:txBody>
+      </p:sp>
+      <p:sp>
+        <p:nvSpPr>
+          <p:cNvPr id="34" name="Text 32"/>
+          <p:cNvSpPr/>
+          <p:nvPr/>
+        </p:nvSpPr>
+        <p:spPr>
+          <a:xfrm>
+            <a:off x="8650224" y="3639312"/>
+            <a:ext cx="2834640" cy="237744"/>
+          </a:xfrm>
+          <a:prstGeom prst="rect">
+            <a:avLst/>
+          </a:prstGeom>
+          <a:noFill/>
+          <a:ln/>
+        </p:spPr>
+        <p:txBody>
+          <a:bodyPr wrap="square" lIns="0" tIns="0" rIns="0" bIns="0" rtlCol="0" anchor="ctr"/>
+          <a:lstStyle/>
+          <a:p>
+            <a:pPr indent="0" marL="0">
+              <a:buNone/>
+            </a:pPr>
+            <a:r>
+              <a:rPr lang="en-US" sz="1050" dirty="0">
+                <a:solidFill>
+                  <a:srgbClr val="5A7186"/>
+                </a:solidFill>
+                <a:latin typeface="Calibri" pitchFamily="34" charset="0"/>
+                <a:ea typeface="Calibri" pitchFamily="34" charset="-122"/>
+                <a:cs typeface="Calibri" pitchFamily="34" charset="-120"/>
+              </a:rPr>
+              <a:t>looping, or a second action</a:t>
+            </a:r>
+            <a:endParaRPr lang="en-US" sz="1050" dirty="0"/>
+          </a:p>
+        </p:txBody>
+      </p:sp>
+      <p:sp>
+        <p:nvSpPr>
+          <p:cNvPr id="35" name="Text 33"/>
+          <p:cNvSpPr/>
+          <p:nvPr/>
+        </p:nvSpPr>
+        <p:spPr>
+          <a:xfrm>
+            <a:off x="8650224" y="4224528"/>
+            <a:ext cx="2834640" cy="237744"/>
+          </a:xfrm>
+          <a:prstGeom prst="rect">
+            <a:avLst/>
+          </a:prstGeom>
+          <a:noFill/>
+          <a:ln/>
+        </p:spPr>
+        <p:txBody>
+          <a:bodyPr wrap="square" lIns="0" tIns="0" rIns="0" bIns="0" rtlCol="0" anchor="ctr"/>
+          <a:lstStyle/>
+          <a:p>
+            <a:pPr indent="0" marL="0">
+              <a:buNone/>
+            </a:pPr>
+            <a:r>
+              <a:rPr lang="en-US" sz="1200" b="1" dirty="0">
+                <a:solidFill>
+                  <a:srgbClr val="22384C"/>
+                </a:solidFill>
+                <a:latin typeface="Calibri" pitchFamily="34" charset="0"/>
+                <a:ea typeface="Calibri" pitchFamily="34" charset="-122"/>
+                <a:cs typeface="Calibri" pitchFamily="34" charset="-120"/>
+              </a:rPr>
+              <a:t>Amazon Bedrock</a:t>
+            </a:r>
+            <a:endParaRPr lang="en-US" sz="1200" dirty="0"/>
+          </a:p>
+        </p:txBody>
+      </p:sp>
+      <p:sp>
+        <p:nvSpPr>
+          <p:cNvPr id="36" name="Text 34"/>
+          <p:cNvSpPr/>
+          <p:nvPr/>
+        </p:nvSpPr>
+        <p:spPr>
+          <a:xfrm>
+            <a:off x="8650224" y="4462272"/>
+            <a:ext cx="2834640" cy="411480"/>
+          </a:xfrm>
+          <a:prstGeom prst="rect">
+            <a:avLst/>
+          </a:prstGeom>
+          <a:noFill/>
+          <a:ln/>
+        </p:spPr>
+        <p:txBody>
+          <a:bodyPr wrap="square" lIns="0" tIns="0" rIns="0" bIns="0" rtlCol="0" anchor="ctr"/>
+          <a:lstStyle/>
+          <a:p>
+            <a:pPr indent="0" marL="0">
+              <a:lnSpc>
+                <a:spcPts val="1300"/>
+              </a:lnSpc>
+              <a:buNone/>
+            </a:pPr>
+            <a:r>
+              <a:rPr lang="en-US" sz="1050" dirty="0">
+                <a:solidFill>
+                  <a:srgbClr val="5A7186"/>
+                </a:solidFill>
+                <a:latin typeface="Calibri" pitchFamily="34" charset="0"/>
+                <a:ea typeface="Calibri" pitchFamily="34" charset="-122"/>
+                <a:cs typeface="Calibri" pitchFamily="34" charset="-120"/>
+              </a:rPr>
+              <a:t>on AgentCore Runtime,</a:t>
+            </a:r>
+            <a:endParaRPr lang="en-US" sz="1050" dirty="0"/>
+          </a:p>
+          <a:p>
+            <a:pPr indent="0" marL="0">
+              <a:lnSpc>
+                <a:spcPts val="1300"/>
+              </a:lnSpc>
+              <a:buNone/>
+            </a:pPr>
+            <a:r>
+              <a:rPr lang="en-US" sz="1050" dirty="0">
+                <a:solidFill>
+                  <a:srgbClr val="5A7186"/>
+                </a:solidFill>
+                <a:latin typeface="Calibri" pitchFamily="34" charset="0"/>
+                <a:ea typeface="Calibri" pitchFamily="34" charset="-122"/>
+                <a:cs typeface="Calibri" pitchFamily="34" charset="-120"/>
+              </a:rPr>
+              <a:t>one session per bakery</a:t>
+            </a:r>
+            <a:endParaRPr lang="en-US" sz="1050" dirty="0"/>
+          </a:p>
+        </p:txBody>
+      </p:sp>
+      <p:sp>
+        <p:nvSpPr>
+          <p:cNvPr id="37" name="Shape 35"/>
+          <p:cNvSpPr/>
+          <p:nvPr/>
+        </p:nvSpPr>
+        <p:spPr>
+          <a:xfrm>
+            <a:off x="3803904" y="3291840"/>
+            <a:ext cx="192024" cy="0"/>
+          </a:xfrm>
+          <a:prstGeom prst="line">
+            <a:avLst/>
+          </a:prstGeom>
+          <a:noFill/>
+          <a:ln w="19050">
+            <a:solidFill>
+              <a:srgbClr val="8FAAC1"/>
+            </a:solidFill>
+            <a:prstDash val="solid"/>
+          </a:ln>
+        </p:spPr>
+      </p:sp>
+      <p:sp>
+        <p:nvSpPr>
+          <p:cNvPr id="38" name="Shape 36"/>
+          <p:cNvSpPr/>
+          <p:nvPr/>
+        </p:nvSpPr>
+        <p:spPr>
+          <a:xfrm rot="5400000">
+            <a:off x="3977640" y="3227832"/>
+            <a:ext cx="137160" cy="128016"/>
+          </a:xfrm>
+          <a:prstGeom prst="triangle">
+            <a:avLst/>
+          </a:prstGeom>
+          <a:solidFill>
+            <a:srgbClr val="8FAAC1"/>
+          </a:solidFill>
+          <a:ln/>
+        </p:spPr>
+      </p:sp>
+      <p:sp>
+        <p:nvSpPr>
+          <p:cNvPr id="39" name="Shape 37"/>
+          <p:cNvSpPr/>
+          <p:nvPr/>
+        </p:nvSpPr>
+        <p:spPr>
+          <a:xfrm>
+            <a:off x="8101584" y="3291840"/>
+            <a:ext cx="192024" cy="0"/>
+          </a:xfrm>
+          <a:prstGeom prst="line">
+            <a:avLst/>
+          </a:prstGeom>
+          <a:noFill/>
+          <a:ln w="19050">
+            <a:solidFill>
+              <a:srgbClr val="8FAAC1"/>
+            </a:solidFill>
+            <a:prstDash val="solid"/>
+          </a:ln>
+        </p:spPr>
+      </p:sp>
+      <p:sp>
+        <p:nvSpPr>
+          <p:cNvPr id="40" name="Shape 38"/>
+          <p:cNvSpPr/>
+          <p:nvPr/>
+        </p:nvSpPr>
+        <p:spPr>
+          <a:xfrm rot="5400000">
+            <a:off x="8275320" y="3227832"/>
+            <a:ext cx="137160" cy="128016"/>
+          </a:xfrm>
+          <a:prstGeom prst="triangle">
+            <a:avLst/>
+          </a:prstGeom>
+          <a:solidFill>
+            <a:srgbClr val="8FAAC1"/>
+          </a:solidFill>
+          <a:ln/>
+        </p:spPr>
+      </p:sp>
+      <p:sp>
+        <p:nvSpPr>
+          <p:cNvPr id="41" name="Shape 39"/>
+          <p:cNvSpPr/>
+          <p:nvPr/>
+        </p:nvSpPr>
+        <p:spPr>
+          <a:xfrm>
+            <a:off x="786384" y="5212080"/>
+            <a:ext cx="10844784" cy="0"/>
+          </a:xfrm>
+          <a:prstGeom prst="line">
+            <a:avLst/>
+          </a:prstGeom>
+          <a:noFill/>
+          <a:ln w="19050">
+            <a:solidFill>
+              <a:srgbClr val="CD395F"/>
+            </a:solidFill>
+            <a:prstDash val="solid"/>
+          </a:ln>
+        </p:spPr>
+      </p:sp>
+      <p:sp>
+        <p:nvSpPr>
+          <p:cNvPr id="42" name="Shape 40"/>
+          <p:cNvSpPr/>
+          <p:nvPr/>
+        </p:nvSpPr>
+        <p:spPr>
+          <a:xfrm>
+            <a:off x="11631168" y="5029200"/>
+            <a:ext cx="0" cy="182880"/>
+          </a:xfrm>
+          <a:prstGeom prst="line">
+            <a:avLst/>
+          </a:prstGeom>
+          <a:noFill/>
+          <a:ln w="19050">
+            <a:solidFill>
+              <a:srgbClr val="CD395F"/>
+            </a:solidFill>
+            <a:prstDash val="solid"/>
+          </a:ln>
+        </p:spPr>
+      </p:sp>
+      <p:sp>
+        <p:nvSpPr>
+          <p:cNvPr id="43" name="Shape 41"/>
+          <p:cNvSpPr/>
+          <p:nvPr/>
+        </p:nvSpPr>
+        <p:spPr>
+          <a:xfrm rot="16200000">
+            <a:off x="722376" y="5148072"/>
+            <a:ext cx="137160" cy="128016"/>
+          </a:xfrm>
+          <a:prstGeom prst="triangle">
+            <a:avLst/>
+          </a:prstGeom>
+          <a:solidFill>
+            <a:srgbClr val="CD395F"/>
+          </a:solidFill>
+          <a:ln/>
+        </p:spPr>
+      </p:sp>
+      <p:sp>
+        <p:nvSpPr>
+          <p:cNvPr id="44" name="Text 42"/>
+          <p:cNvSpPr/>
+          <p:nvPr/>
+        </p:nvSpPr>
+        <p:spPr>
+          <a:xfrm>
+            <a:off x="786384" y="5285232"/>
+            <a:ext cx="10844784" cy="274320"/>
+          </a:xfrm>
+          <a:prstGeom prst="rect">
+            <a:avLst/>
+          </a:prstGeom>
+          <a:noFill/>
+          <a:ln/>
+        </p:spPr>
+        <p:txBody>
+          <a:bodyPr wrap="square" lIns="0" tIns="0" rIns="0" bIns="0" rtlCol="0" anchor="ctr"/>
+          <a:lstStyle/>
+          <a:p>
+            <a:pPr algn="ctr" indent="0" marL="0">
+              <a:buNone/>
+            </a:pPr>
+            <a:r>
+              <a:rPr lang="en-US" sz="1100" dirty="0">
+                <a:solidFill>
+                  <a:srgbClr val="CD395F"/>
+                </a:solidFill>
+                <a:latin typeface="Calibri" pitchFamily="34" charset="0"/>
+                <a:ea typeface="Calibri" pitchFamily="34" charset="-122"/>
+                <a:cs typeface="Calibri" pitchFamily="34" charset="-120"/>
+              </a:rPr>
+              <a:t>Amazon SES   ·   one email, only when a decision needs a person</a:t>
+            </a:r>
+            <a:endParaRPr lang="en-US" sz="1100" dirty="0"/>
+          </a:p>
+        </p:txBody>
+      </p:sp>
+      <p:sp>
+        <p:nvSpPr>
+          <p:cNvPr id="45" name="Shape 43"/>
+          <p:cNvSpPr/>
+          <p:nvPr/>
+        </p:nvSpPr>
+        <p:spPr>
+          <a:xfrm>
+            <a:off x="566928" y="5724144"/>
+            <a:ext cx="11064240" cy="859536"/>
           </a:xfrm>
           <a:prstGeom prst="roundRect">
             <a:avLst>
-              <a:gd name="adj" fmla="val 8197"/>
+              <a:gd name="adj" fmla="val 10638"/>
             </a:avLst>
           </a:prstGeom>
           <a:solidFill>
@@ -7556,79 +9260,157 @@
       </p:sp>
       <p:sp>
         <p:nvSpPr>
-          <p:cNvPr id="27" name="Text 25"/>
-          <p:cNvSpPr/>
-          <p:nvPr/>
-        </p:nvSpPr>
-        <p:spPr>
-          <a:xfrm>
-            <a:off x="914400" y="5431536"/>
-            <a:ext cx="10424160" cy="365760"/>
-          </a:xfrm>
-          <a:prstGeom prst="rect">
-            <a:avLst/>
-          </a:prstGeom>
-          <a:noFill/>
-          <a:ln/>
-        </p:spPr>
-        <p:txBody>
-          <a:bodyPr wrap="square" lIns="0" tIns="0" rIns="0" bIns="0" rtlCol="0" anchor="ctr"/>
-          <a:lstStyle/>
-          <a:p>
-            <a:pPr indent="0" marL="0">
-              <a:buNone/>
-            </a:pPr>
-            <a:r>
-              <a:rPr lang="en-US" sz="2000" b="1" dirty="0">
-                <a:solidFill>
-                  <a:srgbClr val="FFFFFF"/>
-                </a:solidFill>
-                <a:latin typeface="Georgia" pitchFamily="34" charset="0"/>
-                <a:ea typeface="Georgia" pitchFamily="34" charset="-122"/>
-                <a:cs typeface="Georgia" pitchFamily="34" charset="-120"/>
-              </a:rPr>
-              <a:t>The limits are hooks, not prompt text.</a:t>
-            </a:r>
-            <a:endParaRPr lang="en-US" sz="2000" dirty="0"/>
-          </a:p>
-        </p:txBody>
-      </p:sp>
-      <p:sp>
-        <p:nvSpPr>
-          <p:cNvPr id="28" name="Text 26"/>
-          <p:cNvSpPr/>
-          <p:nvPr/>
-        </p:nvSpPr>
-        <p:spPr>
-          <a:xfrm>
-            <a:off x="914400" y="5852160"/>
-            <a:ext cx="10424160" cy="384048"/>
-          </a:xfrm>
-          <a:prstGeom prst="rect">
-            <a:avLst/>
-          </a:prstGeom>
-          <a:noFill/>
-          <a:ln/>
-        </p:spPr>
-        <p:txBody>
-          <a:bodyPr wrap="square" lIns="0" tIns="0" rIns="0" bIns="0" rtlCol="0" anchor="ctr"/>
-          <a:lstStyle/>
-          <a:p>
-            <a:pPr indent="0" marL="0">
-              <a:buNone/>
-            </a:pPr>
-            <a:r>
-              <a:rPr lang="en-US" sz="1350" dirty="0">
-                <a:solidFill>
-                  <a:srgbClr val="AFCBE3"/>
+          <p:cNvPr id="46" name="Text 44"/>
+          <p:cNvSpPr/>
+          <p:nvPr/>
+        </p:nvSpPr>
+        <p:spPr>
+          <a:xfrm>
+            <a:off x="896112" y="5833872"/>
+            <a:ext cx="2194560" cy="274320"/>
+          </a:xfrm>
+          <a:prstGeom prst="rect">
+            <a:avLst/>
+          </a:prstGeom>
+          <a:noFill/>
+          <a:ln/>
+        </p:spPr>
+        <p:txBody>
+          <a:bodyPr wrap="square" lIns="0" tIns="0" rIns="0" bIns="0" rtlCol="0" anchor="ctr"/>
+          <a:lstStyle/>
+          <a:p>
+            <a:pPr indent="0" marL="0">
+              <a:buNone/>
+            </a:pPr>
+            <a:r>
+              <a:rPr lang="en-US" sz="1250" b="1" dirty="0">
+                <a:solidFill>
+                  <a:srgbClr val="5B9BD1"/>
                 </a:solidFill>
                 <a:latin typeface="Calibri" pitchFamily="34" charset="0"/>
                 <a:ea typeface="Calibri" pitchFamily="34" charset="-122"/>
                 <a:cs typeface="Calibri" pitchFamily="34" charset="-120"/>
               </a:rPr>
-              <a:t>A prompt is a request a model can argue with. A hook cancels the run.</a:t>
-            </a:r>
-            <a:endParaRPr lang="en-US" sz="1350" dirty="0"/>
+              <a:t>All day</a:t>
+            </a:r>
+            <a:endParaRPr lang="en-US" sz="1250" dirty="0"/>
+          </a:p>
+        </p:txBody>
+      </p:sp>
+      <p:sp>
+        <p:nvSpPr>
+          <p:cNvPr id="47" name="Text 45"/>
+          <p:cNvSpPr/>
+          <p:nvPr/>
+        </p:nvSpPr>
+        <p:spPr>
+          <a:xfrm>
+            <a:off x="896112" y="6108192"/>
+            <a:ext cx="5212080" cy="292608"/>
+          </a:xfrm>
+          <a:prstGeom prst="rect">
+            <a:avLst/>
+          </a:prstGeom>
+          <a:noFill/>
+          <a:ln/>
+        </p:spPr>
+        <p:txBody>
+          <a:bodyPr wrap="square" lIns="0" tIns="0" rIns="0" bIns="0" rtlCol="0" anchor="ctr"/>
+          <a:lstStyle/>
+          <a:p>
+            <a:pPr indent="0" marL="0">
+              <a:buNone/>
+            </a:pPr>
+            <a:r>
+              <a:rPr lang="en-US" sz="1100" dirty="0">
+                <a:solidFill>
+                  <a:srgbClr val="AFCBE3"/>
+                </a:solidFill>
+                <a:latin typeface="Calibri" pitchFamily="34" charset="0"/>
+                <a:ea typeface="Calibri" pitchFamily="34" charset="-122"/>
+                <a:cs typeface="Calibri" pitchFamily="34" charset="-120"/>
+              </a:rPr>
+              <a:t>receipts land, the page follows, jobs get ticked, and it can be asked anything</a:t>
+            </a:r>
+            <a:endParaRPr lang="en-US" sz="1100" dirty="0"/>
+          </a:p>
+        </p:txBody>
+      </p:sp>
+      <p:sp>
+        <p:nvSpPr>
+          <p:cNvPr id="48" name="Text 46"/>
+          <p:cNvSpPr/>
+          <p:nvPr/>
+        </p:nvSpPr>
+        <p:spPr>
+          <a:xfrm>
+            <a:off x="6492240" y="5833872"/>
+            <a:ext cx="2194560" cy="274320"/>
+          </a:xfrm>
+          <a:prstGeom prst="rect">
+            <a:avLst/>
+          </a:prstGeom>
+          <a:noFill/>
+          <a:ln/>
+        </p:spPr>
+        <p:txBody>
+          <a:bodyPr wrap="square" lIns="0" tIns="0" rIns="0" bIns="0" rtlCol="0" anchor="ctr"/>
+          <a:lstStyle/>
+          <a:p>
+            <a:pPr indent="0" marL="0">
+              <a:buNone/>
+            </a:pPr>
+            <a:r>
+              <a:rPr lang="en-US" sz="1250" b="1" dirty="0">
+                <a:solidFill>
+                  <a:srgbClr val="E38FA6"/>
+                </a:solidFill>
+                <a:latin typeface="Calibri" pitchFamily="34" charset="0"/>
+                <a:ea typeface="Calibri" pitchFamily="34" charset="-122"/>
+                <a:cs typeface="Calibri" pitchFamily="34" charset="-120"/>
+              </a:rPr>
+              <a:t>At closing</a:t>
+            </a:r>
+            <a:endParaRPr lang="en-US" sz="1250" dirty="0"/>
+          </a:p>
+        </p:txBody>
+      </p:sp>
+      <p:sp>
+        <p:nvSpPr>
+          <p:cNvPr id="49" name="Text 47"/>
+          <p:cNvSpPr/>
+          <p:nvPr/>
+        </p:nvSpPr>
+        <p:spPr>
+          <a:xfrm>
+            <a:off x="6492240" y="6108192"/>
+            <a:ext cx="5029200" cy="292608"/>
+          </a:xfrm>
+          <a:prstGeom prst="rect">
+            <a:avLst/>
+          </a:prstGeom>
+          <a:noFill/>
+          <a:ln/>
+        </p:spPr>
+        <p:txBody>
+          <a:bodyPr wrap="square" lIns="0" tIns="0" rIns="0" bIns="0" rtlCol="0" anchor="ctr"/>
+          <a:lstStyle/>
+          <a:p>
+            <a:pPr indent="0" marL="0">
+              <a:buNone/>
+            </a:pPr>
+            <a:r>
+              <a:rPr lang="en-US" sz="1100" dirty="0">
+                <a:solidFill>
+                  <a:srgbClr val="AFCBE3"/>
+                </a:solidFill>
+                <a:latin typeface="Calibri" pitchFamily="34" charset="0"/>
+                <a:ea typeface="Calibri" pitchFamily="34" charset="-122"/>
+                <a:cs typeface="Calibri" pitchFamily="34" charset="-120"/>
+              </a:rPr>
+              <a:t>EventBridge wakes it: it reads the day and decides tomorrow</a:t>
+            </a:r>
+            <a:endParaRPr lang="en-US" sz="1100" dirty="0"/>
           </a:p>
         </p:txBody>
       </p:sp>
